--- a/public/ai.pptx
+++ b/public/ai.pptx
@@ -9,9 +9,15 @@
     <p:sldId id="257" r:id="rId3"/>
     <p:sldId id="258" r:id="rId4"/>
     <p:sldId id="259" r:id="rId5"/>
+    <p:sldId id="260" r:id="rId6"/>
+    <p:sldId id="261" r:id="rId7"/>
+    <p:sldId id="262" r:id="rId8"/>
+    <p:sldId id="263" r:id="rId9"/>
+    <p:sldId id="264" r:id="rId10"/>
+    <p:sldId id="265" r:id="rId11"/>
   </p:sldIdLst>
   <p:notesMasterIdLst>
-    <p:notesMasterId r:id="rId6"/>
+    <p:notesMasterId r:id="rId12"/>
   </p:notesMasterIdLst>
   <p:sldSz cx="12192000" cy="6858000"/>
   <p:notesSz cx="6858000" cy="12192000"/>
@@ -131,14 +137,14 @@
               <c:strCache>
                 <c:ptCount val="1"/>
                 <c:pt idx="0">
-                  <c:v>Hisoblash Quvvati</c:v>
+                  <c:v>Aniqlik ko'rsatkichi</c:v>
                 </c:pt>
               </c:strCache>
             </c:strRef>
           </c:tx>
           <c:spPr>
             <a:solidFill>
-              <a:srgbClr val="F59E0B"/>
+              <a:srgbClr val="3B82F6"/>
             </a:solidFill>
             <a:effectLst/>
           </c:spPr>
@@ -169,18 +175,15 @@
           </c:dLbls>
           <c:cat>
             <c:multiLvlStrRef>
-              <c:f>Sheet1!$A$2:$A$4</c:f>
+              <c:f>Sheet1!$A$2:$A$3</c:f>
               <c:multiLvlStrCache>
-                <c:ptCount val="3"/>
+                <c:ptCount val="2"/>
                 <c:lvl>
                   <c:pt idx="0">
-                    <c:v>1960</c:v>
+                    <c:v>Inson</c:v>
                   </c:pt>
                   <c:pt idx="1">
-                    <c:v>1990</c:v>
-                  </c:pt>
-                  <c:pt idx="2">
-                    <c:v>2024</c:v>
+                    <c:v>AI</c:v>
                   </c:pt>
                 </c:lvl>
               </c:multiLvlStrCache>
@@ -188,18 +191,15 @@
           </c:cat>
           <c:val>
             <c:numRef>
-              <c:f>Sheet1!$B$2:$B$4</c:f>
+              <c:f>Sheet1!$B$2:$B$3</c:f>
               <c:numCache>
                 <c:formatCode>General</c:formatCode>
-                <c:ptCount val="3"/>
+                <c:ptCount val="2"/>
                 <c:pt idx="0">
-                  <c:v>5</c:v>
+                  <c:v>65</c:v>
                 </c:pt>
                 <c:pt idx="1">
-                  <c:v>25</c:v>
-                </c:pt>
-                <c:pt idx="2">
-                  <c:v>100</c:v>
+                  <c:v>88</c:v>
                 </c:pt>
               </c:numCache>
             </c:numRef>
@@ -371,14 +371,506 @@
               <c:strCache>
                 <c:ptCount val="1"/>
                 <c:pt idx="0">
-                  <c:v>AI Qabul Qilish</c:v>
+                  <c:v>Model parametrlari o'sishi</c:v>
                 </c:pt>
               </c:strCache>
             </c:strRef>
           </c:tx>
           <c:spPr>
             <a:solidFill>
-              <a:srgbClr val="22C55E"/>
+              <a:srgbClr val="A855F7"/>
+            </a:solidFill>
+            <a:effectLst/>
+          </c:spPr>
+          <c:invertIfNegative val="0"/>
+          <c:dLbls>
+            <c:numFmt formatCode="#,##0" sourceLinked="0"/>
+            <c:txPr>
+              <a:bodyPr/>
+              <a:lstStyle/>
+              <a:p>
+                <a:pPr>
+                  <a:defRPr b="0" i="0" strike="noStrike" sz="1200" u="none">
+                    <a:solidFill>
+                      <a:srgbClr val="000000"/>
+                    </a:solidFill>
+                    <a:latin typeface="Arial"/>
+                  </a:defRPr>
+                </a:pPr>
+              </a:p>
+            </c:txPr>
+            <c:showLegendKey val="0"/>
+            <c:showVal val="0"/>
+            <c:showCatName val="0"/>
+            <c:showSerName val="0"/>
+            <c:showPercent val="0"/>
+            <c:showBubbleSize val="0"/>
+            <c:showLeaderLines val="0"/>
+          </c:dLbls>
+          <c:cat>
+            <c:multiLvlStrRef>
+              <c:f>Sheet1!$A$2:$A$5</c:f>
+              <c:multiLvlStrCache>
+                <c:ptCount val="4"/>
+                <c:lvl>
+                  <c:pt idx="0">
+                    <c:v>2018</c:v>
+                  </c:pt>
+                  <c:pt idx="1">
+                    <c:v>2020</c:v>
+                  </c:pt>
+                  <c:pt idx="2">
+                    <c:v>2022</c:v>
+                  </c:pt>
+                  <c:pt idx="3">
+                    <c:v>2024</c:v>
+                  </c:pt>
+                </c:lvl>
+              </c:multiLvlStrCache>
+            </c:multiLvlStrRef>
+          </c:cat>
+          <c:val>
+            <c:numRef>
+              <c:f>Sheet1!$B$2:$B$5</c:f>
+              <c:numCache>
+                <c:formatCode>General</c:formatCode>
+                <c:ptCount val="4"/>
+                <c:pt idx="0">
+                  <c:v>10</c:v>
+                </c:pt>
+                <c:pt idx="1">
+                  <c:v>30</c:v>
+                </c:pt>
+                <c:pt idx="2">
+                  <c:v>60</c:v>
+                </c:pt>
+                <c:pt idx="3">
+                  <c:v>100</c:v>
+                </c:pt>
+              </c:numCache>
+            </c:numRef>
+          </c:val>
+        </c:ser>
+        <c:dLbls>
+          <c:numFmt formatCode="#,##0" sourceLinked="0"/>
+          <c:txPr>
+            <a:bodyPr/>
+            <a:lstStyle/>
+            <a:p>
+              <a:pPr>
+                <a:defRPr b="0" i="0" strike="noStrike" sz="1200" u="none">
+                  <a:solidFill>
+                    <a:srgbClr val="000000"/>
+                  </a:solidFill>
+                  <a:latin typeface="Arial"/>
+                </a:defRPr>
+              </a:pPr>
+            </a:p>
+          </c:txPr>
+          <c:showLegendKey val="0"/>
+          <c:showVal val="0"/>
+          <c:showCatName val="0"/>
+          <c:showSerName val="0"/>
+          <c:showPercent val="0"/>
+          <c:showBubbleSize val="0"/>
+          <c:showLeaderLines val="0"/>
+        </c:dLbls>
+        <c:gapWidth val="150"/>
+        <c:overlap val="0"/>
+        <c:axId val="2094734554"/>
+        <c:axId val="2094734552"/>
+        <c:axId val="2094734556"/>
+      </c:barChart>
+      <c:catAx>
+        <c:axId val="2094734554"/>
+        <c:scaling>
+          <c:orientation val="minMax"/>
+        </c:scaling>
+        <c:delete val="0"/>
+        <c:axPos val="b"/>
+        <c:numFmt formatCode="General" sourceLinked="1"/>
+        <c:majorTickMark val="out"/>
+        <c:minorTickMark val="none"/>
+        <c:tickLblPos val="low"/>
+        <c:spPr>
+          <a:ln w="12700" cap="flat">
+            <a:solidFill>
+              <a:srgbClr val="888888"/>
+            </a:solidFill>
+            <a:prstDash val="solid"/>
+            <a:round/>
+          </a:ln>
+        </c:spPr>
+        <c:txPr>
+          <a:bodyPr/>
+          <a:lstStyle/>
+          <a:p>
+            <a:pPr>
+              <a:defRPr sz="1000" b="0" i="0" u="none" strike="noStrike">
+                <a:solidFill>
+                  <a:srgbClr val="000000"/>
+                </a:solidFill>
+                <a:latin typeface="Arial"/>
+              </a:defRPr>
+            </a:pPr>
+            <a:endParaRPr lang="en-US"/>
+          </a:p>
+        </c:txPr>
+        <c:crossAx val="2094734552"/>
+        <c:crosses val="autoZero"/>
+        <c:auto val="1"/>
+        <c:lblAlgn val="ctr"/>
+        <c:noMultiLvlLbl val="1"/>
+      </c:catAx>
+      <c:valAx>
+        <c:axId val="2094734552"/>
+        <c:scaling>
+          <c:orientation val="minMax"/>
+        </c:scaling>
+        <c:delete val="0"/>
+        <c:axPos val="l"/>
+        <c:majorGridlines>
+          <c:spPr>
+            <a:ln w="12700" cap="flat">
+              <a:solidFill>
+                <a:srgbClr val="888888"/>
+              </a:solidFill>
+              <a:prstDash val="solid"/>
+              <a:round/>
+            </a:ln>
+          </c:spPr>
+        </c:majorGridlines>
+        <c:numFmt formatCode="General" sourceLinked="0"/>
+        <c:majorTickMark val="out"/>
+        <c:minorTickMark val="none"/>
+        <c:tickLblPos val="nextTo"/>
+        <c:spPr>
+          <a:ln w="12700" cap="flat">
+            <a:solidFill>
+              <a:srgbClr val="888888"/>
+            </a:solidFill>
+            <a:prstDash val="solid"/>
+            <a:round/>
+          </a:ln>
+        </c:spPr>
+        <c:txPr>
+          <a:bodyPr/>
+          <a:lstStyle/>
+          <a:p>
+            <a:pPr>
+              <a:defRPr sz="1000" b="0" i="0" u="none" strike="noStrike">
+                <a:solidFill>
+                  <a:srgbClr val="000000"/>
+                </a:solidFill>
+                <a:latin typeface="Arial"/>
+              </a:defRPr>
+            </a:pPr>
+            <a:endParaRPr lang="en-US"/>
+          </a:p>
+        </c:txPr>
+        <c:crossAx val="2094734554"/>
+        <c:crosses val="autoZero"/>
+        <c:crossBetween val="between"/>
+      </c:valAx>
+      <c:spPr>
+        <a:noFill/>
+        <a:ln>
+          <a:noFill/>
+        </a:ln>
+        <a:effectLst/>
+      </c:spPr>
+    </c:plotArea>
+    <c:plotVisOnly val="1"/>
+    <c:dispBlanksAs val="span"/>
+  </c:chart>
+  <c:spPr>
+    <a:noFill/>
+    <a:ln>
+      <a:noFill/>
+    </a:ln>
+    <a:effectLst/>
+  </c:spPr>
+  <c:externalData r:id="rId1">
+    <c:autoUpdate val="0"/>
+  </c:externalData>
+</c:chartSpace>
+</file>
+
+<file path=ppt/charts/chart3.xml><?xml version="1.0" encoding="utf-8"?>
+<c:chartSpace xmlns:c="http://schemas.openxmlformats.org/drawingml/2006/chart" xmlns:a="http://schemas.openxmlformats.org/drawingml/2006/main" xmlns:r="http://schemas.openxmlformats.org/officeDocument/2006/relationships">
+  <c:date1904 val="0"/>
+  <c:roundedCorners val="1"/>
+  <c:chart>
+    <c:autoTitleDeleted val="1"/>
+    <c:plotArea>
+      <c:layout/>
+      <c:barChart>
+        <c:barDir val="col"/>
+        <c:grouping val="clustered"/>
+        <c:varyColors val="0"/>
+        <c:ser>
+          <c:idx val="0"/>
+          <c:order val="0"/>
+          <c:tx>
+            <c:strRef>
+              <c:f>Sheet1!$B$1</c:f>
+              <c:strCache>
+                <c:ptCount val="1"/>
+                <c:pt idx="0">
+                  <c:v>AI qo'llanishi (%)</c:v>
+                </c:pt>
+              </c:strCache>
+            </c:strRef>
+          </c:tx>
+          <c:spPr>
+            <a:solidFill>
+              <a:srgbClr val="00D9FF"/>
+            </a:solidFill>
+            <a:effectLst/>
+          </c:spPr>
+          <c:invertIfNegative val="0"/>
+          <c:dLbls>
+            <c:numFmt formatCode="#,##0" sourceLinked="0"/>
+            <c:txPr>
+              <a:bodyPr/>
+              <a:lstStyle/>
+              <a:p>
+                <a:pPr>
+                  <a:defRPr b="0" i="0" strike="noStrike" sz="1200" u="none">
+                    <a:solidFill>
+                      <a:srgbClr val="000000"/>
+                    </a:solidFill>
+                    <a:latin typeface="Arial"/>
+                  </a:defRPr>
+                </a:pPr>
+              </a:p>
+            </c:txPr>
+            <c:showLegendKey val="0"/>
+            <c:showVal val="0"/>
+            <c:showCatName val="0"/>
+            <c:showSerName val="0"/>
+            <c:showPercent val="0"/>
+            <c:showBubbleSize val="0"/>
+            <c:showLeaderLines val="0"/>
+          </c:dLbls>
+          <c:cat>
+            <c:multiLvlStrRef>
+              <c:f>Sheet1!$A$2:$A$5</c:f>
+              <c:multiLvlStrCache>
+                <c:ptCount val="4"/>
+                <c:lvl>
+                  <c:pt idx="0">
+                    <c:v>IT</c:v>
+                  </c:pt>
+                  <c:pt idx="1">
+                    <c:v>Sog'liqni saqlash</c:v>
+                  </c:pt>
+                  <c:pt idx="2">
+                    <c:v>Moliya</c:v>
+                  </c:pt>
+                  <c:pt idx="3">
+                    <c:v>Transport</c:v>
+                  </c:pt>
+                </c:lvl>
+              </c:multiLvlStrCache>
+            </c:multiLvlStrRef>
+          </c:cat>
+          <c:val>
+            <c:numRef>
+              <c:f>Sheet1!$B$2:$B$5</c:f>
+              <c:numCache>
+                <c:formatCode>General</c:formatCode>
+                <c:ptCount val="4"/>
+                <c:pt idx="0">
+                  <c:v>90</c:v>
+                </c:pt>
+                <c:pt idx="1">
+                  <c:v>75</c:v>
+                </c:pt>
+                <c:pt idx="2">
+                  <c:v>80</c:v>
+                </c:pt>
+                <c:pt idx="3">
+                  <c:v>60</c:v>
+                </c:pt>
+              </c:numCache>
+            </c:numRef>
+          </c:val>
+        </c:ser>
+        <c:dLbls>
+          <c:numFmt formatCode="#,##0" sourceLinked="0"/>
+          <c:txPr>
+            <a:bodyPr/>
+            <a:lstStyle/>
+            <a:p>
+              <a:pPr>
+                <a:defRPr b="0" i="0" strike="noStrike" sz="1200" u="none">
+                  <a:solidFill>
+                    <a:srgbClr val="000000"/>
+                  </a:solidFill>
+                  <a:latin typeface="Arial"/>
+                </a:defRPr>
+              </a:pPr>
+            </a:p>
+          </c:txPr>
+          <c:showLegendKey val="0"/>
+          <c:showVal val="0"/>
+          <c:showCatName val="0"/>
+          <c:showSerName val="0"/>
+          <c:showPercent val="0"/>
+          <c:showBubbleSize val="0"/>
+          <c:showLeaderLines val="0"/>
+        </c:dLbls>
+        <c:gapWidth val="150"/>
+        <c:overlap val="0"/>
+        <c:axId val="2094734554"/>
+        <c:axId val="2094734552"/>
+        <c:axId val="2094734556"/>
+      </c:barChart>
+      <c:catAx>
+        <c:axId val="2094734554"/>
+        <c:scaling>
+          <c:orientation val="minMax"/>
+        </c:scaling>
+        <c:delete val="0"/>
+        <c:axPos val="b"/>
+        <c:numFmt formatCode="General" sourceLinked="1"/>
+        <c:majorTickMark val="out"/>
+        <c:minorTickMark val="none"/>
+        <c:tickLblPos val="low"/>
+        <c:spPr>
+          <a:ln w="12700" cap="flat">
+            <a:solidFill>
+              <a:srgbClr val="888888"/>
+            </a:solidFill>
+            <a:prstDash val="solid"/>
+            <a:round/>
+          </a:ln>
+        </c:spPr>
+        <c:txPr>
+          <a:bodyPr/>
+          <a:lstStyle/>
+          <a:p>
+            <a:pPr>
+              <a:defRPr sz="1000" b="0" i="0" u="none" strike="noStrike">
+                <a:solidFill>
+                  <a:srgbClr val="000000"/>
+                </a:solidFill>
+                <a:latin typeface="Arial"/>
+              </a:defRPr>
+            </a:pPr>
+            <a:endParaRPr lang="en-US"/>
+          </a:p>
+        </c:txPr>
+        <c:crossAx val="2094734552"/>
+        <c:crosses val="autoZero"/>
+        <c:auto val="1"/>
+        <c:lblAlgn val="ctr"/>
+        <c:noMultiLvlLbl val="1"/>
+      </c:catAx>
+      <c:valAx>
+        <c:axId val="2094734552"/>
+        <c:scaling>
+          <c:orientation val="minMax"/>
+        </c:scaling>
+        <c:delete val="0"/>
+        <c:axPos val="l"/>
+        <c:majorGridlines>
+          <c:spPr>
+            <a:ln w="12700" cap="flat">
+              <a:solidFill>
+                <a:srgbClr val="888888"/>
+              </a:solidFill>
+              <a:prstDash val="solid"/>
+              <a:round/>
+            </a:ln>
+          </c:spPr>
+        </c:majorGridlines>
+        <c:numFmt formatCode="General" sourceLinked="0"/>
+        <c:majorTickMark val="out"/>
+        <c:minorTickMark val="none"/>
+        <c:tickLblPos val="nextTo"/>
+        <c:spPr>
+          <a:ln w="12700" cap="flat">
+            <a:solidFill>
+              <a:srgbClr val="888888"/>
+            </a:solidFill>
+            <a:prstDash val="solid"/>
+            <a:round/>
+          </a:ln>
+        </c:spPr>
+        <c:txPr>
+          <a:bodyPr/>
+          <a:lstStyle/>
+          <a:p>
+            <a:pPr>
+              <a:defRPr sz="1000" b="0" i="0" u="none" strike="noStrike">
+                <a:solidFill>
+                  <a:srgbClr val="000000"/>
+                </a:solidFill>
+                <a:latin typeface="Arial"/>
+              </a:defRPr>
+            </a:pPr>
+            <a:endParaRPr lang="en-US"/>
+          </a:p>
+        </c:txPr>
+        <c:crossAx val="2094734554"/>
+        <c:crosses val="autoZero"/>
+        <c:crossBetween val="between"/>
+      </c:valAx>
+      <c:spPr>
+        <a:noFill/>
+        <a:ln>
+          <a:noFill/>
+        </a:ln>
+        <a:effectLst/>
+      </c:spPr>
+    </c:plotArea>
+    <c:plotVisOnly val="1"/>
+    <c:dispBlanksAs val="span"/>
+  </c:chart>
+  <c:spPr>
+    <a:noFill/>
+    <a:ln>
+      <a:noFill/>
+    </a:ln>
+    <a:effectLst/>
+  </c:spPr>
+  <c:externalData r:id="rId1">
+    <c:autoUpdate val="0"/>
+  </c:externalData>
+</c:chartSpace>
+</file>
+
+<file path=ppt/charts/chart4.xml><?xml version="1.0" encoding="utf-8"?>
+<c:chartSpace xmlns:c="http://schemas.openxmlformats.org/drawingml/2006/chart" xmlns:a="http://schemas.openxmlformats.org/drawingml/2006/main" xmlns:r="http://schemas.openxmlformats.org/officeDocument/2006/relationships">
+  <c:date1904 val="0"/>
+  <c:roundedCorners val="1"/>
+  <c:chart>
+    <c:autoTitleDeleted val="1"/>
+    <c:plotArea>
+      <c:layout/>
+      <c:barChart>
+        <c:barDir val="col"/>
+        <c:grouping val="clustered"/>
+        <c:varyColors val="0"/>
+        <c:ser>
+          <c:idx val="0"/>
+          <c:order val="0"/>
+          <c:tx>
+            <c:strRef>
+              <c:f>Sheet1!$B$1</c:f>
+              <c:strCache>
+                <c:ptCount val="1"/>
+                <c:pt idx="0">
+                  <c:v>Xavfsizlik byudjeti</c:v>
+                </c:pt>
+              </c:strCache>
+            </c:strRef>
+          </c:tx>
+          <c:spPr>
+            <a:solidFill>
+              <a:srgbClr val="3B82F6"/>
             </a:solidFill>
             <a:effectLst/>
           </c:spPr>
@@ -414,13 +906,13 @@
                 <c:ptCount val="3"/>
                 <c:lvl>
                   <c:pt idx="0">
+                    <c:v>2022</c:v>
+                  </c:pt>
+                  <c:pt idx="1">
                     <c:v>2023</c:v>
                   </c:pt>
-                  <c:pt idx="1">
+                  <c:pt idx="2">
                     <c:v>2024</c:v>
-                  </c:pt>
-                  <c:pt idx="2">
-                    <c:v>2025</c:v>
                   </c:pt>
                 </c:lvl>
               </c:multiLvlStrCache>
@@ -433,10 +925,250 @@
                 <c:formatCode>General</c:formatCode>
                 <c:ptCount val="3"/>
                 <c:pt idx="0">
-                  <c:v>60</c:v>
+                  <c:v>30</c:v>
                 </c:pt>
                 <c:pt idx="1">
-                  <c:v>75</c:v>
+                  <c:v>50</c:v>
+                </c:pt>
+                <c:pt idx="2">
+                  <c:v>80</c:v>
+                </c:pt>
+              </c:numCache>
+            </c:numRef>
+          </c:val>
+        </c:ser>
+        <c:dLbls>
+          <c:numFmt formatCode="#,##0" sourceLinked="0"/>
+          <c:txPr>
+            <a:bodyPr/>
+            <a:lstStyle/>
+            <a:p>
+              <a:pPr>
+                <a:defRPr b="0" i="0" strike="noStrike" sz="1200" u="none">
+                  <a:solidFill>
+                    <a:srgbClr val="000000"/>
+                  </a:solidFill>
+                  <a:latin typeface="Arial"/>
+                </a:defRPr>
+              </a:pPr>
+            </a:p>
+          </c:txPr>
+          <c:showLegendKey val="0"/>
+          <c:showVal val="0"/>
+          <c:showCatName val="0"/>
+          <c:showSerName val="0"/>
+          <c:showPercent val="0"/>
+          <c:showBubbleSize val="0"/>
+          <c:showLeaderLines val="0"/>
+        </c:dLbls>
+        <c:gapWidth val="150"/>
+        <c:overlap val="0"/>
+        <c:axId val="2094734554"/>
+        <c:axId val="2094734552"/>
+        <c:axId val="2094734556"/>
+      </c:barChart>
+      <c:catAx>
+        <c:axId val="2094734554"/>
+        <c:scaling>
+          <c:orientation val="minMax"/>
+        </c:scaling>
+        <c:delete val="0"/>
+        <c:axPos val="b"/>
+        <c:numFmt formatCode="General" sourceLinked="1"/>
+        <c:majorTickMark val="out"/>
+        <c:minorTickMark val="none"/>
+        <c:tickLblPos val="low"/>
+        <c:spPr>
+          <a:ln w="12700" cap="flat">
+            <a:solidFill>
+              <a:srgbClr val="888888"/>
+            </a:solidFill>
+            <a:prstDash val="solid"/>
+            <a:round/>
+          </a:ln>
+        </c:spPr>
+        <c:txPr>
+          <a:bodyPr/>
+          <a:lstStyle/>
+          <a:p>
+            <a:pPr>
+              <a:defRPr sz="1000" b="0" i="0" u="none" strike="noStrike">
+                <a:solidFill>
+                  <a:srgbClr val="000000"/>
+                </a:solidFill>
+                <a:latin typeface="Arial"/>
+              </a:defRPr>
+            </a:pPr>
+            <a:endParaRPr lang="en-US"/>
+          </a:p>
+        </c:txPr>
+        <c:crossAx val="2094734552"/>
+        <c:crosses val="autoZero"/>
+        <c:auto val="1"/>
+        <c:lblAlgn val="ctr"/>
+        <c:noMultiLvlLbl val="1"/>
+      </c:catAx>
+      <c:valAx>
+        <c:axId val="2094734552"/>
+        <c:scaling>
+          <c:orientation val="minMax"/>
+        </c:scaling>
+        <c:delete val="0"/>
+        <c:axPos val="l"/>
+        <c:majorGridlines>
+          <c:spPr>
+            <a:ln w="12700" cap="flat">
+              <a:solidFill>
+                <a:srgbClr val="888888"/>
+              </a:solidFill>
+              <a:prstDash val="solid"/>
+              <a:round/>
+            </a:ln>
+          </c:spPr>
+        </c:majorGridlines>
+        <c:numFmt formatCode="General" sourceLinked="0"/>
+        <c:majorTickMark val="out"/>
+        <c:minorTickMark val="none"/>
+        <c:tickLblPos val="nextTo"/>
+        <c:spPr>
+          <a:ln w="12700" cap="flat">
+            <a:solidFill>
+              <a:srgbClr val="888888"/>
+            </a:solidFill>
+            <a:prstDash val="solid"/>
+            <a:round/>
+          </a:ln>
+        </c:spPr>
+        <c:txPr>
+          <a:bodyPr/>
+          <a:lstStyle/>
+          <a:p>
+            <a:pPr>
+              <a:defRPr sz="1000" b="0" i="0" u="none" strike="noStrike">
+                <a:solidFill>
+                  <a:srgbClr val="000000"/>
+                </a:solidFill>
+                <a:latin typeface="Arial"/>
+              </a:defRPr>
+            </a:pPr>
+            <a:endParaRPr lang="en-US"/>
+          </a:p>
+        </c:txPr>
+        <c:crossAx val="2094734554"/>
+        <c:crosses val="autoZero"/>
+        <c:crossBetween val="between"/>
+      </c:valAx>
+      <c:spPr>
+        <a:noFill/>
+        <a:ln>
+          <a:noFill/>
+        </a:ln>
+        <a:effectLst/>
+      </c:spPr>
+    </c:plotArea>
+    <c:plotVisOnly val="1"/>
+    <c:dispBlanksAs val="span"/>
+  </c:chart>
+  <c:spPr>
+    <a:noFill/>
+    <a:ln>
+      <a:noFill/>
+    </a:ln>
+    <a:effectLst/>
+  </c:spPr>
+  <c:externalData r:id="rId1">
+    <c:autoUpdate val="0"/>
+  </c:externalData>
+</c:chartSpace>
+</file>
+
+<file path=ppt/charts/chart5.xml><?xml version="1.0" encoding="utf-8"?>
+<c:chartSpace xmlns:c="http://schemas.openxmlformats.org/drawingml/2006/chart" xmlns:a="http://schemas.openxmlformats.org/drawingml/2006/main" xmlns:r="http://schemas.openxmlformats.org/officeDocument/2006/relationships">
+  <c:date1904 val="0"/>
+  <c:roundedCorners val="1"/>
+  <c:chart>
+    <c:autoTitleDeleted val="1"/>
+    <c:plotArea>
+      <c:layout/>
+      <c:barChart>
+        <c:barDir val="col"/>
+        <c:grouping val="clustered"/>
+        <c:varyColors val="0"/>
+        <c:ser>
+          <c:idx val="0"/>
+          <c:order val="0"/>
+          <c:tx>
+            <c:strRef>
+              <c:f>Sheet1!$B$1</c:f>
+              <c:strCache>
+                <c:ptCount val="1"/>
+                <c:pt idx="0">
+                  <c:v>AI integratsiyasi</c:v>
+                </c:pt>
+              </c:strCache>
+            </c:strRef>
+          </c:tx>
+          <c:spPr>
+            <a:solidFill>
+              <a:srgbClr val="00D9FF"/>
+            </a:solidFill>
+            <a:effectLst/>
+          </c:spPr>
+          <c:invertIfNegative val="0"/>
+          <c:dLbls>
+            <c:numFmt formatCode="#,##0" sourceLinked="0"/>
+            <c:txPr>
+              <a:bodyPr/>
+              <a:lstStyle/>
+              <a:p>
+                <a:pPr>
+                  <a:defRPr b="0" i="0" strike="noStrike" sz="1200" u="none">
+                    <a:solidFill>
+                      <a:srgbClr val="000000"/>
+                    </a:solidFill>
+                    <a:latin typeface="Arial"/>
+                  </a:defRPr>
+                </a:pPr>
+              </a:p>
+            </c:txPr>
+            <c:showLegendKey val="0"/>
+            <c:showVal val="0"/>
+            <c:showCatName val="0"/>
+            <c:showSerName val="0"/>
+            <c:showPercent val="0"/>
+            <c:showBubbleSize val="0"/>
+            <c:showLeaderLines val="0"/>
+          </c:dLbls>
+          <c:cat>
+            <c:multiLvlStrRef>
+              <c:f>Sheet1!$A$2:$A$4</c:f>
+              <c:multiLvlStrCache>
+                <c:ptCount val="3"/>
+                <c:lvl>
+                  <c:pt idx="0">
+                    <c:v>Kichik</c:v>
+                  </c:pt>
+                  <c:pt idx="1">
+                    <c:v>O'rta</c:v>
+                  </c:pt>
+                  <c:pt idx="2">
+                    <c:v>Katta</c:v>
+                  </c:pt>
+                </c:lvl>
+              </c:multiLvlStrCache>
+            </c:multiLvlStrRef>
+          </c:cat>
+          <c:val>
+            <c:numRef>
+              <c:f>Sheet1!$B$2:$B$4</c:f>
+              <c:numCache>
+                <c:formatCode>General</c:formatCode>
+                <c:ptCount val="3"/>
+                <c:pt idx="0">
+                  <c:v>20</c:v>
+                </c:pt>
+                <c:pt idx="1">
+                  <c:v>50</c:v>
                 </c:pt>
                 <c:pt idx="2">
                   <c:v>90</c:v>
@@ -1027,6 +1759,94 @@
 </p:notes>
 </file>
 
+<file path=ppt/notesSlides/notesSlide10.xml><?xml version="1.0" encoding="utf-8"?>
+<p:notes xmlns:a="http://schemas.openxmlformats.org/drawingml/2006/main" xmlns:r="http://schemas.openxmlformats.org/officeDocument/2006/relationships" xmlns:p="http://schemas.openxmlformats.org/presentationml/2006/main">
+  <p:cSld>
+    <p:spTree>
+      <p:nvGrpSpPr>
+        <p:cNvPr id="1" name=""/>
+        <p:cNvGrpSpPr/>
+        <p:nvPr/>
+      </p:nvGrpSpPr>
+      <p:grpSpPr>
+        <a:xfrm>
+          <a:off x="0" y="0"/>
+          <a:ext cx="0" cy="0"/>
+          <a:chOff x="0" y="0"/>
+          <a:chExt cx="0" cy="0"/>
+        </a:xfrm>
+      </p:grpSpPr>
+      <p:sp>
+        <p:nvSpPr>
+          <p:cNvPr id="2" name="Slide Image Placeholder 1"/>
+          <p:cNvSpPr>
+            <a:spLocks noGrp="1" noRot="1" noChangeAspect="1"/>
+          </p:cNvSpPr>
+          <p:nvPr>
+            <p:ph type="sldImg"/>
+          </p:nvPr>
+        </p:nvSpPr>
+        <p:spPr/>
+      </p:sp>
+      <p:sp>
+        <p:nvSpPr>
+          <p:cNvPr id="3" name="Notes Placeholder 2"/>
+          <p:cNvSpPr>
+            <a:spLocks noGrp="1"/>
+          </p:cNvSpPr>
+          <p:nvPr>
+            <p:ph type="body" idx="1"/>
+          </p:nvPr>
+        </p:nvSpPr>
+        <p:spPr/>
+        <p:txBody>
+          <a:bodyPr/>
+          <a:lstStyle/>
+          <a:p>
+            <a:r>
+              <a:rPr lang="en-US" dirty="0"/>
+              <a:t/>
+            </a:r>
+            <a:endParaRPr lang="en-US" dirty="0"/>
+          </a:p>
+        </p:txBody>
+      </p:sp>
+      <p:sp>
+        <p:nvSpPr>
+          <p:cNvPr id="4" name="Slide Number Placeholder 3"/>
+          <p:cNvSpPr>
+            <a:spLocks noGrp="1"/>
+          </p:cNvSpPr>
+          <p:nvPr>
+            <p:ph type="sldNum" sz="quarter" idx="10"/>
+          </p:nvPr>
+        </p:nvSpPr>
+        <p:spPr/>
+        <p:txBody>
+          <a:bodyPr/>
+          <a:lstStyle/>
+          <a:p>
+            <a:fld id="{F7021451-1387-4CA6-816F-3879F97B5CBC}" type="slidenum">
+              <a:rPr lang="en-US"/>
+              <a:t>10</a:t>
+            </a:fld>
+            <a:endParaRPr lang="en-US"/>
+          </a:p>
+        </p:txBody>
+      </p:sp>
+    </p:spTree>
+    <p:extLst>
+      <p:ext uri="{BB962C8B-B14F-4D97-AF65-F5344CB8AC3E}">
+        <p14:creationId xmlns:p14="http://schemas.microsoft.com/office/powerpoint/2010/main" val="1024086991"/>
+      </p:ext>
+    </p:extLst>
+  </p:cSld>
+  <p:clrMapOvr>
+    <a:masterClrMapping/>
+  </p:clrMapOvr>
+</p:notes>
+</file>
+
 <file path=ppt/notesSlides/notesSlide2.xml><?xml version="1.0" encoding="utf-8"?>
 <p:notes xmlns:a="http://schemas.openxmlformats.org/drawingml/2006/main" xmlns:r="http://schemas.openxmlformats.org/officeDocument/2006/relationships" xmlns:p="http://schemas.openxmlformats.org/presentationml/2006/main">
   <p:cSld>
@@ -1273,6 +2093,446 @@
             <a:fld id="{F7021451-1387-4CA6-816F-3879F97B5CBC}" type="slidenum">
               <a:rPr lang="en-US"/>
               <a:t>4</a:t>
+            </a:fld>
+            <a:endParaRPr lang="en-US"/>
+          </a:p>
+        </p:txBody>
+      </p:sp>
+    </p:spTree>
+    <p:extLst>
+      <p:ext uri="{BB962C8B-B14F-4D97-AF65-F5344CB8AC3E}">
+        <p14:creationId xmlns:p14="http://schemas.microsoft.com/office/powerpoint/2010/main" val="1024086991"/>
+      </p:ext>
+    </p:extLst>
+  </p:cSld>
+  <p:clrMapOvr>
+    <a:masterClrMapping/>
+  </p:clrMapOvr>
+</p:notes>
+</file>
+
+<file path=ppt/notesSlides/notesSlide5.xml><?xml version="1.0" encoding="utf-8"?>
+<p:notes xmlns:a="http://schemas.openxmlformats.org/drawingml/2006/main" xmlns:r="http://schemas.openxmlformats.org/officeDocument/2006/relationships" xmlns:p="http://schemas.openxmlformats.org/presentationml/2006/main">
+  <p:cSld>
+    <p:spTree>
+      <p:nvGrpSpPr>
+        <p:cNvPr id="1" name=""/>
+        <p:cNvGrpSpPr/>
+        <p:nvPr/>
+      </p:nvGrpSpPr>
+      <p:grpSpPr>
+        <a:xfrm>
+          <a:off x="0" y="0"/>
+          <a:ext cx="0" cy="0"/>
+          <a:chOff x="0" y="0"/>
+          <a:chExt cx="0" cy="0"/>
+        </a:xfrm>
+      </p:grpSpPr>
+      <p:sp>
+        <p:nvSpPr>
+          <p:cNvPr id="2" name="Slide Image Placeholder 1"/>
+          <p:cNvSpPr>
+            <a:spLocks noGrp="1" noRot="1" noChangeAspect="1"/>
+          </p:cNvSpPr>
+          <p:nvPr>
+            <p:ph type="sldImg"/>
+          </p:nvPr>
+        </p:nvSpPr>
+        <p:spPr/>
+      </p:sp>
+      <p:sp>
+        <p:nvSpPr>
+          <p:cNvPr id="3" name="Notes Placeholder 2"/>
+          <p:cNvSpPr>
+            <a:spLocks noGrp="1"/>
+          </p:cNvSpPr>
+          <p:nvPr>
+            <p:ph type="body" idx="1"/>
+          </p:nvPr>
+        </p:nvSpPr>
+        <p:spPr/>
+        <p:txBody>
+          <a:bodyPr/>
+          <a:lstStyle/>
+          <a:p>
+            <a:r>
+              <a:rPr lang="en-US" dirty="0"/>
+              <a:t/>
+            </a:r>
+            <a:endParaRPr lang="en-US" dirty="0"/>
+          </a:p>
+        </p:txBody>
+      </p:sp>
+      <p:sp>
+        <p:nvSpPr>
+          <p:cNvPr id="4" name="Slide Number Placeholder 3"/>
+          <p:cNvSpPr>
+            <a:spLocks noGrp="1"/>
+          </p:cNvSpPr>
+          <p:nvPr>
+            <p:ph type="sldNum" sz="quarter" idx="10"/>
+          </p:nvPr>
+        </p:nvSpPr>
+        <p:spPr/>
+        <p:txBody>
+          <a:bodyPr/>
+          <a:lstStyle/>
+          <a:p>
+            <a:fld id="{F7021451-1387-4CA6-816F-3879F97B5CBC}" type="slidenum">
+              <a:rPr lang="en-US"/>
+              <a:t>5</a:t>
+            </a:fld>
+            <a:endParaRPr lang="en-US"/>
+          </a:p>
+        </p:txBody>
+      </p:sp>
+    </p:spTree>
+    <p:extLst>
+      <p:ext uri="{BB962C8B-B14F-4D97-AF65-F5344CB8AC3E}">
+        <p14:creationId xmlns:p14="http://schemas.microsoft.com/office/powerpoint/2010/main" val="1024086991"/>
+      </p:ext>
+    </p:extLst>
+  </p:cSld>
+  <p:clrMapOvr>
+    <a:masterClrMapping/>
+  </p:clrMapOvr>
+</p:notes>
+</file>
+
+<file path=ppt/notesSlides/notesSlide6.xml><?xml version="1.0" encoding="utf-8"?>
+<p:notes xmlns:a="http://schemas.openxmlformats.org/drawingml/2006/main" xmlns:r="http://schemas.openxmlformats.org/officeDocument/2006/relationships" xmlns:p="http://schemas.openxmlformats.org/presentationml/2006/main">
+  <p:cSld>
+    <p:spTree>
+      <p:nvGrpSpPr>
+        <p:cNvPr id="1" name=""/>
+        <p:cNvGrpSpPr/>
+        <p:nvPr/>
+      </p:nvGrpSpPr>
+      <p:grpSpPr>
+        <a:xfrm>
+          <a:off x="0" y="0"/>
+          <a:ext cx="0" cy="0"/>
+          <a:chOff x="0" y="0"/>
+          <a:chExt cx="0" cy="0"/>
+        </a:xfrm>
+      </p:grpSpPr>
+      <p:sp>
+        <p:nvSpPr>
+          <p:cNvPr id="2" name="Slide Image Placeholder 1"/>
+          <p:cNvSpPr>
+            <a:spLocks noGrp="1" noRot="1" noChangeAspect="1"/>
+          </p:cNvSpPr>
+          <p:nvPr>
+            <p:ph type="sldImg"/>
+          </p:nvPr>
+        </p:nvSpPr>
+        <p:spPr/>
+      </p:sp>
+      <p:sp>
+        <p:nvSpPr>
+          <p:cNvPr id="3" name="Notes Placeholder 2"/>
+          <p:cNvSpPr>
+            <a:spLocks noGrp="1"/>
+          </p:cNvSpPr>
+          <p:nvPr>
+            <p:ph type="body" idx="1"/>
+          </p:nvPr>
+        </p:nvSpPr>
+        <p:spPr/>
+        <p:txBody>
+          <a:bodyPr/>
+          <a:lstStyle/>
+          <a:p>
+            <a:r>
+              <a:rPr lang="en-US" dirty="0"/>
+              <a:t/>
+            </a:r>
+            <a:endParaRPr lang="en-US" dirty="0"/>
+          </a:p>
+        </p:txBody>
+      </p:sp>
+      <p:sp>
+        <p:nvSpPr>
+          <p:cNvPr id="4" name="Slide Number Placeholder 3"/>
+          <p:cNvSpPr>
+            <a:spLocks noGrp="1"/>
+          </p:cNvSpPr>
+          <p:nvPr>
+            <p:ph type="sldNum" sz="quarter" idx="10"/>
+          </p:nvPr>
+        </p:nvSpPr>
+        <p:spPr/>
+        <p:txBody>
+          <a:bodyPr/>
+          <a:lstStyle/>
+          <a:p>
+            <a:fld id="{F7021451-1387-4CA6-816F-3879F97B5CBC}" type="slidenum">
+              <a:rPr lang="en-US"/>
+              <a:t>6</a:t>
+            </a:fld>
+            <a:endParaRPr lang="en-US"/>
+          </a:p>
+        </p:txBody>
+      </p:sp>
+    </p:spTree>
+    <p:extLst>
+      <p:ext uri="{BB962C8B-B14F-4D97-AF65-F5344CB8AC3E}">
+        <p14:creationId xmlns:p14="http://schemas.microsoft.com/office/powerpoint/2010/main" val="1024086991"/>
+      </p:ext>
+    </p:extLst>
+  </p:cSld>
+  <p:clrMapOvr>
+    <a:masterClrMapping/>
+  </p:clrMapOvr>
+</p:notes>
+</file>
+
+<file path=ppt/notesSlides/notesSlide7.xml><?xml version="1.0" encoding="utf-8"?>
+<p:notes xmlns:a="http://schemas.openxmlformats.org/drawingml/2006/main" xmlns:r="http://schemas.openxmlformats.org/officeDocument/2006/relationships" xmlns:p="http://schemas.openxmlformats.org/presentationml/2006/main">
+  <p:cSld>
+    <p:spTree>
+      <p:nvGrpSpPr>
+        <p:cNvPr id="1" name=""/>
+        <p:cNvGrpSpPr/>
+        <p:nvPr/>
+      </p:nvGrpSpPr>
+      <p:grpSpPr>
+        <a:xfrm>
+          <a:off x="0" y="0"/>
+          <a:ext cx="0" cy="0"/>
+          <a:chOff x="0" y="0"/>
+          <a:chExt cx="0" cy="0"/>
+        </a:xfrm>
+      </p:grpSpPr>
+      <p:sp>
+        <p:nvSpPr>
+          <p:cNvPr id="2" name="Slide Image Placeholder 1"/>
+          <p:cNvSpPr>
+            <a:spLocks noGrp="1" noRot="1" noChangeAspect="1"/>
+          </p:cNvSpPr>
+          <p:nvPr>
+            <p:ph type="sldImg"/>
+          </p:nvPr>
+        </p:nvSpPr>
+        <p:spPr/>
+      </p:sp>
+      <p:sp>
+        <p:nvSpPr>
+          <p:cNvPr id="3" name="Notes Placeholder 2"/>
+          <p:cNvSpPr>
+            <a:spLocks noGrp="1"/>
+          </p:cNvSpPr>
+          <p:nvPr>
+            <p:ph type="body" idx="1"/>
+          </p:nvPr>
+        </p:nvSpPr>
+        <p:spPr/>
+        <p:txBody>
+          <a:bodyPr/>
+          <a:lstStyle/>
+          <a:p>
+            <a:r>
+              <a:rPr lang="en-US" dirty="0"/>
+              <a:t/>
+            </a:r>
+            <a:endParaRPr lang="en-US" dirty="0"/>
+          </a:p>
+        </p:txBody>
+      </p:sp>
+      <p:sp>
+        <p:nvSpPr>
+          <p:cNvPr id="4" name="Slide Number Placeholder 3"/>
+          <p:cNvSpPr>
+            <a:spLocks noGrp="1"/>
+          </p:cNvSpPr>
+          <p:nvPr>
+            <p:ph type="sldNum" sz="quarter" idx="10"/>
+          </p:nvPr>
+        </p:nvSpPr>
+        <p:spPr/>
+        <p:txBody>
+          <a:bodyPr/>
+          <a:lstStyle/>
+          <a:p>
+            <a:fld id="{F7021451-1387-4CA6-816F-3879F97B5CBC}" type="slidenum">
+              <a:rPr lang="en-US"/>
+              <a:t>7</a:t>
+            </a:fld>
+            <a:endParaRPr lang="en-US"/>
+          </a:p>
+        </p:txBody>
+      </p:sp>
+    </p:spTree>
+    <p:extLst>
+      <p:ext uri="{BB962C8B-B14F-4D97-AF65-F5344CB8AC3E}">
+        <p14:creationId xmlns:p14="http://schemas.microsoft.com/office/powerpoint/2010/main" val="1024086991"/>
+      </p:ext>
+    </p:extLst>
+  </p:cSld>
+  <p:clrMapOvr>
+    <a:masterClrMapping/>
+  </p:clrMapOvr>
+</p:notes>
+</file>
+
+<file path=ppt/notesSlides/notesSlide8.xml><?xml version="1.0" encoding="utf-8"?>
+<p:notes xmlns:a="http://schemas.openxmlformats.org/drawingml/2006/main" xmlns:r="http://schemas.openxmlformats.org/officeDocument/2006/relationships" xmlns:p="http://schemas.openxmlformats.org/presentationml/2006/main">
+  <p:cSld>
+    <p:spTree>
+      <p:nvGrpSpPr>
+        <p:cNvPr id="1" name=""/>
+        <p:cNvGrpSpPr/>
+        <p:nvPr/>
+      </p:nvGrpSpPr>
+      <p:grpSpPr>
+        <a:xfrm>
+          <a:off x="0" y="0"/>
+          <a:ext cx="0" cy="0"/>
+          <a:chOff x="0" y="0"/>
+          <a:chExt cx="0" cy="0"/>
+        </a:xfrm>
+      </p:grpSpPr>
+      <p:sp>
+        <p:nvSpPr>
+          <p:cNvPr id="2" name="Slide Image Placeholder 1"/>
+          <p:cNvSpPr>
+            <a:spLocks noGrp="1" noRot="1" noChangeAspect="1"/>
+          </p:cNvSpPr>
+          <p:nvPr>
+            <p:ph type="sldImg"/>
+          </p:nvPr>
+        </p:nvSpPr>
+        <p:spPr/>
+      </p:sp>
+      <p:sp>
+        <p:nvSpPr>
+          <p:cNvPr id="3" name="Notes Placeholder 2"/>
+          <p:cNvSpPr>
+            <a:spLocks noGrp="1"/>
+          </p:cNvSpPr>
+          <p:nvPr>
+            <p:ph type="body" idx="1"/>
+          </p:nvPr>
+        </p:nvSpPr>
+        <p:spPr/>
+        <p:txBody>
+          <a:bodyPr/>
+          <a:lstStyle/>
+          <a:p>
+            <a:r>
+              <a:rPr lang="en-US" dirty="0"/>
+              <a:t/>
+            </a:r>
+            <a:endParaRPr lang="en-US" dirty="0"/>
+          </a:p>
+        </p:txBody>
+      </p:sp>
+      <p:sp>
+        <p:nvSpPr>
+          <p:cNvPr id="4" name="Slide Number Placeholder 3"/>
+          <p:cNvSpPr>
+            <a:spLocks noGrp="1"/>
+          </p:cNvSpPr>
+          <p:nvPr>
+            <p:ph type="sldNum" sz="quarter" idx="10"/>
+          </p:nvPr>
+        </p:nvSpPr>
+        <p:spPr/>
+        <p:txBody>
+          <a:bodyPr/>
+          <a:lstStyle/>
+          <a:p>
+            <a:fld id="{F7021451-1387-4CA6-816F-3879F97B5CBC}" type="slidenum">
+              <a:rPr lang="en-US"/>
+              <a:t>8</a:t>
+            </a:fld>
+            <a:endParaRPr lang="en-US"/>
+          </a:p>
+        </p:txBody>
+      </p:sp>
+    </p:spTree>
+    <p:extLst>
+      <p:ext uri="{BB962C8B-B14F-4D97-AF65-F5344CB8AC3E}">
+        <p14:creationId xmlns:p14="http://schemas.microsoft.com/office/powerpoint/2010/main" val="1024086991"/>
+      </p:ext>
+    </p:extLst>
+  </p:cSld>
+  <p:clrMapOvr>
+    <a:masterClrMapping/>
+  </p:clrMapOvr>
+</p:notes>
+</file>
+
+<file path=ppt/notesSlides/notesSlide9.xml><?xml version="1.0" encoding="utf-8"?>
+<p:notes xmlns:a="http://schemas.openxmlformats.org/drawingml/2006/main" xmlns:r="http://schemas.openxmlformats.org/officeDocument/2006/relationships" xmlns:p="http://schemas.openxmlformats.org/presentationml/2006/main">
+  <p:cSld>
+    <p:spTree>
+      <p:nvGrpSpPr>
+        <p:cNvPr id="1" name=""/>
+        <p:cNvGrpSpPr/>
+        <p:nvPr/>
+      </p:nvGrpSpPr>
+      <p:grpSpPr>
+        <a:xfrm>
+          <a:off x="0" y="0"/>
+          <a:ext cx="0" cy="0"/>
+          <a:chOff x="0" y="0"/>
+          <a:chExt cx="0" cy="0"/>
+        </a:xfrm>
+      </p:grpSpPr>
+      <p:sp>
+        <p:nvSpPr>
+          <p:cNvPr id="2" name="Slide Image Placeholder 1"/>
+          <p:cNvSpPr>
+            <a:spLocks noGrp="1" noRot="1" noChangeAspect="1"/>
+          </p:cNvSpPr>
+          <p:nvPr>
+            <p:ph type="sldImg"/>
+          </p:nvPr>
+        </p:nvSpPr>
+        <p:spPr/>
+      </p:sp>
+      <p:sp>
+        <p:nvSpPr>
+          <p:cNvPr id="3" name="Notes Placeholder 2"/>
+          <p:cNvSpPr>
+            <a:spLocks noGrp="1"/>
+          </p:cNvSpPr>
+          <p:nvPr>
+            <p:ph type="body" idx="1"/>
+          </p:nvPr>
+        </p:nvSpPr>
+        <p:spPr/>
+        <p:txBody>
+          <a:bodyPr/>
+          <a:lstStyle/>
+          <a:p>
+            <a:r>
+              <a:rPr lang="en-US" dirty="0"/>
+              <a:t/>
+            </a:r>
+            <a:endParaRPr lang="en-US" dirty="0"/>
+          </a:p>
+        </p:txBody>
+      </p:sp>
+      <p:sp>
+        <p:nvSpPr>
+          <p:cNvPr id="4" name="Slide Number Placeholder 3"/>
+          <p:cNvSpPr>
+            <a:spLocks noGrp="1"/>
+          </p:cNvSpPr>
+          <p:nvPr>
+            <p:ph type="sldNum" sz="quarter" idx="10"/>
+          </p:nvPr>
+        </p:nvSpPr>
+        <p:spPr/>
+        <p:txBody>
+          <a:bodyPr/>
+          <a:lstStyle/>
+          <a:p>
+            <a:fld id="{F7021451-1387-4CA6-816F-3879F97B5CBC}" type="slidenum">
+              <a:rPr lang="en-US"/>
+              <a:t>9</a:t>
             </a:fld>
             <a:endParaRPr lang="en-US"/>
           </a:p>
@@ -1617,7 +2877,7 @@
       </p:grpSpPr>
       <p:pic>
         <p:nvPicPr>
-          <p:cNvPr id="2" name="Image 0" descr="https://images.pexels.com/photos/14314636/pexels-photo-14314636.jpeg?auto=compress&amp;cs=tinysrgb&amp;dpr=2&amp;h=650&amp;w=940">    </p:cNvPr>
+          <p:cNvPr id="2" name="Image 0" descr="https://images.pexels.com/photos/10827984/pexels-photo-10827984.jpeg?auto=compress&amp;cs=tinysrgb&amp;dpr=2&amp;h=650&amp;w=940">    </p:cNvPr>
           <p:cNvPicPr>
             <a:picLocks noChangeAspect="1"/>
           </p:cNvPicPr>
@@ -1683,11 +2943,11 @@
             <a:avLst/>
           </a:prstGeom>
           <a:solidFill>
-            <a:srgbClr val="00D9FF"/>
+            <a:srgbClr val="22C55E"/>
           </a:solidFill>
           <a:ln w="12700">
             <a:solidFill>
-              <a:srgbClr val="00D9FF"/>
+              <a:srgbClr val="22C55E"/>
             </a:solidFill>
             <a:prstDash val="solid"/>
           </a:ln>
@@ -1695,7 +2955,7 @@
       </p:sp>
       <p:pic>
         <p:nvPicPr>
-          <p:cNvPr id="5" name="Image 1" descr="https://images.pexels.com/photos/14314636/pexels-photo-14314636.jpeg?auto=compress&amp;cs=tinysrgb&amp;dpr=2&amp;h=650&amp;w=940">    </p:cNvPr>
+          <p:cNvPr id="5" name="Image 1" descr="https://images.pexels.com/photos/10827984/pexels-photo-10827984.jpeg?auto=compress&amp;cs=tinysrgb&amp;dpr=2&amp;h=650&amp;w=940">    </p:cNvPr>
           <p:cNvPicPr>
             <a:picLocks noChangeAspect="1"/>
           </p:cNvPicPr>
@@ -1781,7 +3041,7 @@
                 <a:ea typeface="Aptos" pitchFamily="34" charset="-122"/>
                 <a:cs typeface="Aptos" pitchFamily="34" charset="-120"/>
               </a:rPr>
-              <a:t>Sun'iy Intellekt: Kelajak Texnologiyasi</a:t>
+              <a:t>Sunʼiy Intellekt: Kelajak Texnologiyasi</a:t>
             </a:r>
             <a:endParaRPr lang="en-US" sz="2800" dirty="0"/>
           </a:p>
@@ -1822,7 +3082,7 @@
                 <a:ea typeface="Aptos" pitchFamily="34" charset="-122"/>
                 <a:cs typeface="Aptos" pitchFamily="34" charset="-120"/>
               </a:rPr>
-              <a:t>AI insoniyat taraqqiyotini yangi bosqichga olib chiqmoqda. Avtomatlashtirish, tahlil va ijodkorlik endi raqamli zeka yordamida amalga oshiriladi.</a:t>
+              <a:t>Sunʼiy intellekt global miqyosda innovatsiyalarni qayta belgilamoqda. Biz kelajakning aqlli va avtomatlashtirilgan davriga qadam qo‘ymoqdamiz.</a:t>
             </a:r>
             <a:endParaRPr lang="en-US" sz="1600" dirty="0"/>
           </a:p>
@@ -1859,6 +3119,516 @@
                 </a:solidFill>
               </a:rPr>
               <a:t>1</a:t>
+            </a:r>
+            <a:endParaRPr lang="en-US" sz="1000" dirty="0"/>
+          </a:p>
+        </p:txBody>
+      </p:sp>
+    </p:spTree>
+  </p:cSld>
+  <p:clrMapOvr>
+    <a:masterClrMapping/>
+  </p:clrMapOvr>
+</p:sld>
+</file>
+
+<file path=ppt/slides/slide10.xml><?xml version="1.0" encoding="utf-8"?>
+<p:sld xmlns:a="http://schemas.openxmlformats.org/drawingml/2006/main" xmlns:r="http://schemas.openxmlformats.org/officeDocument/2006/relationships" xmlns:p="http://schemas.openxmlformats.org/presentationml/2006/main">
+  <p:cSld name="Slide 10">
+    <p:spTree>
+      <p:nvGrpSpPr>
+        <p:cNvPr id="1" name=""/>
+        <p:cNvGrpSpPr/>
+        <p:nvPr/>
+      </p:nvGrpSpPr>
+      <p:grpSpPr>
+        <a:xfrm>
+          <a:off x="0" y="0"/>
+          <a:ext cx="0" cy="0"/>
+          <a:chOff x="0" y="0"/>
+          <a:chExt cx="0" cy="0"/>
+        </a:xfrm>
+      </p:grpSpPr>
+      <p:pic>
+        <p:nvPicPr>
+          <p:cNvPr id="2" name="Image 0" descr="https://images.pexels.com/photos/37911520/pexels-photo-37911520.jpeg?auto=compress&amp;cs=tinysrgb&amp;dpr=2&amp;h=650&amp;w=940">    </p:cNvPr>
+          <p:cNvPicPr>
+            <a:picLocks noChangeAspect="1"/>
+          </p:cNvPicPr>
+          <p:nvPr/>
+        </p:nvPicPr>
+        <p:blipFill>
+          <a:blip r:embed="rId1"/>
+          <a:stretch>
+            <a:fillRect/>
+          </a:stretch>
+        </p:blipFill>
+        <p:spPr>
+          <a:xfrm>
+            <a:off x="0" y="0"/>
+            <a:ext cx="12188952" cy="6858000"/>
+          </a:xfrm>
+          <a:prstGeom prst="rect">
+            <a:avLst/>
+          </a:prstGeom>
+        </p:spPr>
+      </p:pic>
+      <p:sp>
+        <p:nvSpPr>
+          <p:cNvPr id="3" name="Shape 0"/>
+          <p:cNvSpPr/>
+          <p:nvPr/>
+        </p:nvSpPr>
+        <p:spPr>
+          <a:xfrm>
+            <a:off x="0" y="0"/>
+            <a:ext cx="12188952" cy="6858000"/>
+          </a:xfrm>
+          <a:prstGeom prst="rect">
+            <a:avLst/>
+          </a:prstGeom>
+          <a:solidFill>
+            <a:srgbClr val="000000">
+              <a:alpha val="35000"/>
+            </a:srgbClr>
+          </a:solidFill>
+          <a:ln w="12700">
+            <a:solidFill>
+              <a:srgbClr val="000000">
+                <a:alpha val="0"/>
+              </a:srgbClr>
+            </a:solidFill>
+            <a:prstDash val="solid"/>
+          </a:ln>
+        </p:spPr>
+      </p:sp>
+      <p:sp>
+        <p:nvSpPr>
+          <p:cNvPr id="4" name="Shape 1"/>
+          <p:cNvSpPr/>
+          <p:nvPr/>
+        </p:nvSpPr>
+        <p:spPr>
+          <a:xfrm>
+            <a:off x="0" y="0"/>
+            <a:ext cx="12188952" cy="73152"/>
+          </a:xfrm>
+          <a:prstGeom prst="rect">
+            <a:avLst/>
+          </a:prstGeom>
+          <a:solidFill>
+            <a:srgbClr val="00D9FF"/>
+          </a:solidFill>
+          <a:ln w="12700">
+            <a:solidFill>
+              <a:srgbClr val="00D9FF"/>
+            </a:solidFill>
+            <a:prstDash val="solid"/>
+          </a:ln>
+        </p:spPr>
+      </p:sp>
+      <p:sp>
+        <p:nvSpPr>
+          <p:cNvPr id="5" name="Text 2"/>
+          <p:cNvSpPr/>
+          <p:nvPr/>
+        </p:nvSpPr>
+        <p:spPr>
+          <a:xfrm>
+            <a:off x="731520" y="640080"/>
+            <a:ext cx="10515600" cy="731520"/>
+          </a:xfrm>
+          <a:prstGeom prst="rect">
+            <a:avLst/>
+          </a:prstGeom>
+          <a:noFill/>
+          <a:ln/>
+        </p:spPr>
+        <p:txBody>
+          <a:bodyPr wrap="square" rtlCol="0" anchor="ctr"/>
+          <a:lstStyle/>
+          <a:p>
+            <a:pPr algn="ctr" indent="0" marL="0">
+              <a:buNone/>
+            </a:pPr>
+            <a:r>
+              <a:rPr lang="en-US" sz="2400" b="1" dirty="0">
+                <a:solidFill>
+                  <a:srgbClr val="FFFFFF"/>
+                </a:solidFill>
+                <a:latin typeface="Aptos" pitchFamily="34" charset="0"/>
+                <a:ea typeface="Aptos" pitchFamily="34" charset="-122"/>
+                <a:cs typeface="Aptos" pitchFamily="34" charset="-120"/>
+              </a:rPr>
+              <a:t>Xulosa: Kelajakka Qadam</a:t>
+            </a:r>
+            <a:endParaRPr lang="en-US" sz="2400" dirty="0"/>
+          </a:p>
+        </p:txBody>
+      </p:sp>
+      <p:sp>
+        <p:nvSpPr>
+          <p:cNvPr id="6" name="Shape 3"/>
+          <p:cNvSpPr/>
+          <p:nvPr/>
+        </p:nvSpPr>
+        <p:spPr>
+          <a:xfrm>
+            <a:off x="731520" y="1645920"/>
+            <a:ext cx="10607040" cy="3474720"/>
+          </a:xfrm>
+          <a:prstGeom prst="roundRect">
+            <a:avLst>
+              <a:gd name="adj" fmla="val 3158"/>
+            </a:avLst>
+          </a:prstGeom>
+          <a:solidFill>
+            <a:srgbClr val="111827">
+              <a:alpha val="92000"/>
+            </a:srgbClr>
+          </a:solidFill>
+          <a:ln w="12700">
+            <a:solidFill>
+              <a:srgbClr val="00D9FF"/>
+            </a:solidFill>
+            <a:prstDash val="solid"/>
+          </a:ln>
+        </p:spPr>
+      </p:sp>
+      <p:sp>
+        <p:nvSpPr>
+          <p:cNvPr id="7" name="Text 4"/>
+          <p:cNvSpPr/>
+          <p:nvPr/>
+        </p:nvSpPr>
+        <p:spPr>
+          <a:xfrm>
+            <a:off x="1005840" y="1920240"/>
+            <a:ext cx="5943600" cy="2743200"/>
+          </a:xfrm>
+          <a:prstGeom prst="rect">
+            <a:avLst/>
+          </a:prstGeom>
+          <a:noFill/>
+          <a:ln/>
+        </p:spPr>
+        <p:txBody>
+          <a:bodyPr wrap="square" rtlCol="0" anchor="ctr">
+            <a:normAutofit/>
+          </a:bodyPr>
+          <a:lstStyle/>
+          <a:p>
+            <a:pPr indent="0" marL="0">
+              <a:buNone/>
+            </a:pPr>
+            <a:r>
+              <a:rPr lang="en-US" sz="1500" dirty="0">
+                <a:solidFill>
+                  <a:srgbClr val="CBD5E1"/>
+                </a:solidFill>
+                <a:latin typeface="Aptos" pitchFamily="34" charset="0"/>
+                <a:ea typeface="Aptos" pitchFamily="34" charset="-122"/>
+                <a:cs typeface="Aptos" pitchFamily="34" charset="-120"/>
+              </a:rPr>
+              <a:t>Sunʼiy intellekt — shunchaki texnologiya emas, balki insoniyat taraqqiyotining yangi bosqichi. Biz kelajakni birgalikda barpo etamiz. 🚀</a:t>
+            </a:r>
+            <a:endParaRPr lang="en-US" sz="1500" dirty="0"/>
+          </a:p>
+          <a:p>
+            <a:pPr indent="0" marL="0">
+              <a:buNone/>
+            </a:pPr>
+            <a:endParaRPr lang="en-US" sz="1500" dirty="0"/>
+          </a:p>
+          <a:p>
+            <a:pPr indent="0" marL="0">
+              <a:buNone/>
+            </a:pPr>
+            <a:r>
+              <a:rPr lang="en-US" sz="1500" dirty="0">
+                <a:solidFill>
+                  <a:srgbClr val="CBD5E1"/>
+                </a:solidFill>
+                <a:latin typeface="Aptos" pitchFamily="34" charset="0"/>
+                <a:ea typeface="Aptos" pitchFamily="34" charset="-122"/>
+                <a:cs typeface="Aptos" pitchFamily="34" charset="-120"/>
+              </a:rPr>
+              <a:t>• Innovatsiyani qabul qiling</a:t>
+            </a:r>
+            <a:endParaRPr lang="en-US" sz="1500" dirty="0"/>
+          </a:p>
+          <a:p>
+            <a:pPr indent="0" marL="0">
+              <a:buNone/>
+            </a:pPr>
+            <a:r>
+              <a:rPr lang="en-US" sz="1500" dirty="0">
+                <a:solidFill>
+                  <a:srgbClr val="CBD5E1"/>
+                </a:solidFill>
+                <a:latin typeface="Aptos" pitchFamily="34" charset="0"/>
+                <a:ea typeface="Aptos" pitchFamily="34" charset="-122"/>
+                <a:cs typeface="Aptos" pitchFamily="34" charset="-120"/>
+              </a:rPr>
+              <a:t>• Texnologik malakalarni oshiring</a:t>
+            </a:r>
+            <a:endParaRPr lang="en-US" sz="1500" dirty="0"/>
+          </a:p>
+          <a:p>
+            <a:pPr indent="0" marL="0">
+              <a:buNone/>
+            </a:pPr>
+            <a:r>
+              <a:rPr lang="en-US" sz="1500" dirty="0">
+                <a:solidFill>
+                  <a:srgbClr val="CBD5E1"/>
+                </a:solidFill>
+                <a:latin typeface="Aptos" pitchFamily="34" charset="0"/>
+                <a:ea typeface="Aptos" pitchFamily="34" charset="-122"/>
+                <a:cs typeface="Aptos" pitchFamily="34" charset="-120"/>
+              </a:rPr>
+              <a:t>• Kelajak uchun mas'uliyatni his eting</a:t>
+            </a:r>
+            <a:endParaRPr lang="en-US" sz="1500" dirty="0"/>
+          </a:p>
+        </p:txBody>
+      </p:sp>
+      <p:sp>
+        <p:nvSpPr>
+          <p:cNvPr id="8" name="Shape 5"/>
+          <p:cNvSpPr/>
+          <p:nvPr/>
+        </p:nvSpPr>
+        <p:spPr>
+          <a:xfrm>
+            <a:off x="7315200" y="4069080"/>
+            <a:ext cx="3200400" cy="868680"/>
+          </a:xfrm>
+          <a:prstGeom prst="roundRect">
+            <a:avLst>
+              <a:gd name="adj" fmla="val 8421"/>
+            </a:avLst>
+          </a:prstGeom>
+          <a:solidFill>
+            <a:srgbClr val="00D9FF">
+              <a:alpha val="82000"/>
+            </a:srgbClr>
+          </a:solidFill>
+          <a:ln w="12700">
+            <a:solidFill>
+              <a:srgbClr val="00D9FF"/>
+            </a:solidFill>
+            <a:prstDash val="solid"/>
+          </a:ln>
+        </p:spPr>
+      </p:sp>
+      <p:sp>
+        <p:nvSpPr>
+          <p:cNvPr id="9" name="Text 6"/>
+          <p:cNvSpPr/>
+          <p:nvPr/>
+        </p:nvSpPr>
+        <p:spPr>
+          <a:xfrm>
+            <a:off x="7452360" y="4233672"/>
+            <a:ext cx="2880360" cy="713232"/>
+          </a:xfrm>
+          <a:prstGeom prst="rect">
+            <a:avLst/>
+          </a:prstGeom>
+          <a:noFill/>
+          <a:ln/>
+        </p:spPr>
+        <p:txBody>
+          <a:bodyPr wrap="square" rtlCol="0" anchor="ctr">
+            <a:normAutofit/>
+          </a:bodyPr>
+          <a:lstStyle/>
+          <a:p>
+            <a:pPr indent="0" marL="0">
+              <a:buNone/>
+            </a:pPr>
+            <a:r>
+              <a:rPr lang="en-US" sz="1000" b="1" dirty="0">
+                <a:solidFill>
+                  <a:srgbClr val="FFFFFF"/>
+                </a:solidFill>
+              </a:rPr>
+              <a:t>📊 AI kelajakdagi 90% kasblarning ajralmas qismiga aylanadi.</a:t>
+            </a:r>
+            <a:endParaRPr lang="en-US" sz="1000" dirty="0"/>
+          </a:p>
+        </p:txBody>
+      </p:sp>
+      <p:graphicFrame>
+        <p:nvGraphicFramePr>
+          <p:cNvPr id="10" name="Chart 0" descr=""/>
+          <p:cNvGraphicFramePr/>
+          <p:nvPr/>
+        </p:nvGraphicFramePr>
+        <p:xfrm>
+          <a:off x="7635240" y="2057400"/>
+          <a:ext cx="2194560" cy="1280160"/>
+        </p:xfrm>
+        <a:graphic xmlns:a="http://schemas.openxmlformats.org/drawingml/2006/main">
+          <a:graphicData uri="http://schemas.openxmlformats.org/drawingml/2006/chart">
+            <c:chart xmlns:c="http://schemas.openxmlformats.org/drawingml/2006/chart" r:id="rId2"/>
+          </a:graphicData>
+        </a:graphic>
+      </p:graphicFrame>
+      <p:sp>
+        <p:nvSpPr>
+          <p:cNvPr id="11" name="Shape 7"/>
+          <p:cNvSpPr/>
+          <p:nvPr/>
+        </p:nvSpPr>
+        <p:spPr>
+          <a:xfrm>
+            <a:off x="9235440" y="3017520"/>
+            <a:ext cx="0" cy="731520"/>
+          </a:xfrm>
+          <a:prstGeom prst="line">
+            <a:avLst/>
+          </a:prstGeom>
+          <a:noFill/>
+          <a:ln w="25400">
+            <a:solidFill>
+              <a:srgbClr val="00D9FF"/>
+            </a:solidFill>
+            <a:prstDash val="solid"/>
+          </a:ln>
+        </p:spPr>
+      </p:sp>
+      <p:sp>
+        <p:nvSpPr>
+          <p:cNvPr id="12" name="Shape 8"/>
+          <p:cNvSpPr/>
+          <p:nvPr/>
+        </p:nvSpPr>
+        <p:spPr>
+          <a:xfrm>
+            <a:off x="8412480" y="2651760"/>
+            <a:ext cx="164592" cy="164592"/>
+          </a:xfrm>
+          <a:prstGeom prst="ellipse">
+            <a:avLst/>
+          </a:prstGeom>
+          <a:solidFill>
+            <a:srgbClr val="00D9FF"/>
+          </a:solidFill>
+          <a:ln w="12700">
+            <a:solidFill>
+              <a:srgbClr val="00D9FF"/>
+            </a:solidFill>
+            <a:prstDash val="solid"/>
+          </a:ln>
+        </p:spPr>
+      </p:sp>
+      <p:sp>
+        <p:nvSpPr>
+          <p:cNvPr id="13" name="Shape 9"/>
+          <p:cNvSpPr/>
+          <p:nvPr/>
+        </p:nvSpPr>
+        <p:spPr>
+          <a:xfrm>
+            <a:off x="9235440" y="2651760"/>
+            <a:ext cx="164592" cy="164592"/>
+          </a:xfrm>
+          <a:prstGeom prst="ellipse">
+            <a:avLst/>
+          </a:prstGeom>
+          <a:solidFill>
+            <a:srgbClr val="00D9FF"/>
+          </a:solidFill>
+          <a:ln w="12700">
+            <a:solidFill>
+              <a:srgbClr val="00D9FF"/>
+            </a:solidFill>
+            <a:prstDash val="solid"/>
+          </a:ln>
+        </p:spPr>
+      </p:sp>
+      <p:sp>
+        <p:nvSpPr>
+          <p:cNvPr id="14" name="Shape 10"/>
+          <p:cNvSpPr/>
+          <p:nvPr/>
+        </p:nvSpPr>
+        <p:spPr>
+          <a:xfrm>
+            <a:off x="10058400" y="2651760"/>
+            <a:ext cx="164592" cy="164592"/>
+          </a:xfrm>
+          <a:prstGeom prst="ellipse">
+            <a:avLst/>
+          </a:prstGeom>
+          <a:solidFill>
+            <a:srgbClr val="00D9FF"/>
+          </a:solidFill>
+          <a:ln w="12700">
+            <a:solidFill>
+              <a:srgbClr val="00D9FF"/>
+            </a:solidFill>
+            <a:prstDash val="solid"/>
+          </a:ln>
+        </p:spPr>
+      </p:sp>
+      <p:pic>
+        <p:nvPicPr>
+          <p:cNvPr id="15" name="Image 1" descr="https://images.pexels.com/photos/37911520/pexels-photo-37911520.jpeg?auto=compress&amp;cs=tinysrgb&amp;dpr=2&amp;h=650&amp;w=940">    </p:cNvPr>
+          <p:cNvPicPr>
+            <a:picLocks noChangeAspect="1"/>
+          </p:cNvPicPr>
+          <p:nvPr/>
+        </p:nvPicPr>
+        <p:blipFill>
+          <a:blip r:embed="rId3"/>
+          <a:stretch>
+            <a:fillRect/>
+          </a:stretch>
+        </p:blipFill>
+        <p:spPr>
+          <a:xfrm>
+            <a:off x="8138160" y="1828800"/>
+            <a:ext cx="2286000" cy="1920240"/>
+          </a:xfrm>
+          <a:prstGeom prst="rect">
+            <a:avLst/>
+          </a:prstGeom>
+        </p:spPr>
+      </p:pic>
+      <p:sp>
+        <p:nvSpPr>
+          <p:cNvPr id="16" name="Text 11"/>
+          <p:cNvSpPr/>
+          <p:nvPr/>
+        </p:nvSpPr>
+        <p:spPr>
+          <a:xfrm>
+            <a:off x="10972800" y="6217920"/>
+            <a:ext cx="365760" cy="182880"/>
+          </a:xfrm>
+          <a:prstGeom prst="rect">
+            <a:avLst/>
+          </a:prstGeom>
+          <a:noFill/>
+          <a:ln/>
+        </p:spPr>
+        <p:txBody>
+          <a:bodyPr wrap="square" rtlCol="0" anchor="ctr"/>
+          <a:lstStyle/>
+          <a:p>
+            <a:pPr indent="0" marL="0">
+              <a:buNone/>
+            </a:pPr>
+            <a:r>
+              <a:rPr lang="en-US" sz="1000" dirty="0">
+                <a:solidFill>
+                  <a:srgbClr val="94A3B8"/>
+                </a:solidFill>
+              </a:rPr>
+              <a:t>10</a:t>
             </a:r>
             <a:endParaRPr lang="en-US" sz="1000" dirty="0"/>
           </a:p>
@@ -1891,7 +3661,7 @@
       </p:grpSpPr>
       <p:pic>
         <p:nvPicPr>
-          <p:cNvPr id="2" name="Image 0" descr="https://images.pexels.com/photos/17483868/pexels-photo-17483868.jpeg?auto=compress&amp;cs=tinysrgb&amp;dpr=2&amp;h=650&amp;w=940">    </p:cNvPr>
+          <p:cNvPr id="2" name="Image 0" descr="https://images.pexels.com/photos/2020309/pexels-photo-2020309.jpeg?auto=compress&amp;cs=tinysrgb&amp;dpr=2&amp;h=650&amp;w=940">    </p:cNvPr>
           <p:cNvPicPr>
             <a:picLocks noChangeAspect="1"/>
           </p:cNvPicPr>
@@ -1957,11 +3727,11 @@
             <a:avLst/>
           </a:prstGeom>
           <a:solidFill>
-            <a:srgbClr val="22C55E"/>
+            <a:srgbClr val="3B82F6"/>
           </a:solidFill>
           <a:ln w="12700">
             <a:solidFill>
-              <a:srgbClr val="22C55E"/>
+              <a:srgbClr val="3B82F6"/>
             </a:solidFill>
             <a:prstDash val="solid"/>
           </a:ln>
@@ -2033,7 +3803,7 @@
                 <a:ea typeface="Aptos" pitchFamily="34" charset="-122"/>
                 <a:cs typeface="Aptos" pitchFamily="34" charset="-120"/>
               </a:rPr>
-              <a:t>Asosiy Imkoniyatlar</a:t>
+              <a:t>AI Qanday Ishlaydi?</a:t>
             </a:r>
             <a:endParaRPr lang="en-US" sz="2400" dirty="0"/>
           </a:p>
@@ -2068,13 +3838,13 @@
             <a:r>
               <a:rPr lang="en-US" sz="1500" dirty="0">
                 <a:solidFill>
-                  <a:srgbClr val="CBD5E1"/>
+                  <a:srgbClr val="DBEAFE"/>
                 </a:solidFill>
                 <a:latin typeface="Aptos" pitchFamily="34" charset="0"/>
                 <a:ea typeface="Aptos" pitchFamily="34" charset="-122"/>
                 <a:cs typeface="Aptos" pitchFamily="34" charset="-120"/>
               </a:rPr>
-              <a:t>Sun'iy intellekt murakkab vazifalarni soddalashtirish orqali samaradorlikni oshiradi. 🚀</a:t>
+              <a:t>AI murakkab algoritmlar va katta hajmdagi ma'lumotlar to‘plami orqali o‘rganadi. 🚀</a:t>
             </a:r>
             <a:endParaRPr lang="en-US" sz="1500" dirty="0"/>
           </a:p>
@@ -2091,13 +3861,13 @@
             <a:r>
               <a:rPr lang="en-US" sz="1500" dirty="0">
                 <a:solidFill>
-                  <a:srgbClr val="CBD5E1"/>
+                  <a:srgbClr val="DBEAFE"/>
                 </a:solidFill>
                 <a:latin typeface="Aptos" pitchFamily="34" charset="0"/>
                 <a:ea typeface="Aptos" pitchFamily="34" charset="-122"/>
                 <a:cs typeface="Aptos" pitchFamily="34" charset="-120"/>
               </a:rPr>
-              <a:t>• Ma'lumotlarni tezkor tahlil qilish</a:t>
+              <a:t>Asosiy bosqichlar:</a:t>
             </a:r>
             <a:endParaRPr lang="en-US" sz="1500" dirty="0"/>
           </a:p>
@@ -2108,13 +3878,13 @@
             <a:r>
               <a:rPr lang="en-US" sz="1500" dirty="0">
                 <a:solidFill>
-                  <a:srgbClr val="CBD5E1"/>
+                  <a:srgbClr val="DBEAFE"/>
                 </a:solidFill>
                 <a:latin typeface="Aptos" pitchFamily="34" charset="0"/>
                 <a:ea typeface="Aptos" pitchFamily="34" charset="-122"/>
                 <a:cs typeface="Aptos" pitchFamily="34" charset="-120"/>
               </a:rPr>
-              <a:t>• Avtomatlashtirilgan mijozlarga xizmat</a:t>
+              <a:t>• Ma'lumotlarni yig'ish va tahlil qilish</a:t>
             </a:r>
             <a:endParaRPr lang="en-US" sz="1500" dirty="0"/>
           </a:p>
@@ -2125,21 +3895,38 @@
             <a:r>
               <a:rPr lang="en-US" sz="1500" dirty="0">
                 <a:solidFill>
-                  <a:srgbClr val="CBD5E1"/>
+                  <a:srgbClr val="DBEAFE"/>
                 </a:solidFill>
                 <a:latin typeface="Aptos" pitchFamily="34" charset="0"/>
                 <a:ea typeface="Aptos" pitchFamily="34" charset="-122"/>
                 <a:cs typeface="Aptos" pitchFamily="34" charset="-120"/>
               </a:rPr>
-              <a:t>• Bashoratli modellashtirish 📈</a:t>
+              <a:t>• Naqshlarni aniqlash</a:t>
             </a:r>
             <a:endParaRPr lang="en-US" sz="1500" dirty="0"/>
           </a:p>
+          <a:p>
+            <a:pPr indent="0" marL="0">
+              <a:buNone/>
+            </a:pPr>
+            <a:r>
+              <a:rPr lang="en-US" sz="1500" dirty="0">
+                <a:solidFill>
+                  <a:srgbClr val="DBEAFE"/>
+                </a:solidFill>
+                <a:latin typeface="Aptos" pitchFamily="34" charset="0"/>
+                <a:ea typeface="Aptos" pitchFamily="34" charset="-122"/>
+                <a:cs typeface="Aptos" pitchFamily="34" charset="-120"/>
+              </a:rPr>
+              <a:t>• Bashoratli modellarni yaratish</a:t>
+            </a:r>
+            <a:endParaRPr lang="en-US" sz="1500" dirty="0"/>
+          </a:p>
         </p:txBody>
       </p:sp>
       <p:pic>
         <p:nvPicPr>
-          <p:cNvPr id="8" name="Image 1" descr="https://images.pexels.com/photos/17483868/pexels-photo-17483868.jpeg?auto=compress&amp;cs=tinysrgb&amp;dpr=2&amp;h=650&amp;w=940">    </p:cNvPr>
+          <p:cNvPr id="8" name="Image 1" descr="https://images.pexels.com/photos/2020309/pexels-photo-2020309.jpeg?auto=compress&amp;cs=tinysrgb&amp;dpr=2&amp;h=650&amp;w=940">    </p:cNvPr>
           <p:cNvPicPr>
             <a:picLocks noChangeAspect="1"/>
           </p:cNvPicPr>
@@ -2194,7 +3981,7 @@
                 <a:ea typeface="Arial" pitchFamily="34" charset="-122"/>
                 <a:cs typeface="Arial" pitchFamily="34" charset="-120"/>
               </a:rPr>
-              <a:t>⚡</a:t>
+              <a:t>🚀</a:t>
             </a:r>
             <a:endParaRPr lang="en-US" sz="2200" dirty="0"/>
           </a:p>
@@ -2263,7 +4050,7 @@
       </p:grpSpPr>
       <p:pic>
         <p:nvPicPr>
-          <p:cNvPr id="2" name="Image 0" descr="https://images.pexels.com/photos/25626518/pexels-photo-25626518.jpeg?auto=compress&amp;cs=tinysrgb&amp;dpr=2&amp;h=650&amp;w=940">    </p:cNvPr>
+          <p:cNvPr id="2" name="Image 0" descr="https://images.pexels.com/photos/19233057/pexels-photo-19233057.jpeg?auto=compress&amp;cs=tinysrgb&amp;dpr=2&amp;h=650&amp;w=940">    </p:cNvPr>
           <p:cNvPicPr>
             <a:picLocks noChangeAspect="1"/>
           </p:cNvPicPr>
@@ -2339,16 +4126,71 @@
           </a:ln>
         </p:spPr>
       </p:sp>
-      <p:sp>
-        <p:nvSpPr>
-          <p:cNvPr id="5" name="Text 2"/>
-          <p:cNvSpPr/>
-          <p:nvPr/>
-        </p:nvSpPr>
-        <p:spPr>
-          <a:xfrm>
-            <a:off x="731520" y="640080"/>
-            <a:ext cx="10515600" cy="731520"/>
+      <p:pic>
+        <p:nvPicPr>
+          <p:cNvPr id="5" name="Image 1" descr="https://images.pexels.com/photos/19233057/pexels-photo-19233057.jpeg?auto=compress&amp;cs=tinysrgb&amp;dpr=2&amp;h=650&amp;w=940">    </p:cNvPr>
+          <p:cNvPicPr>
+            <a:picLocks noChangeAspect="1"/>
+          </p:cNvPicPr>
+          <p:nvPr/>
+        </p:nvPicPr>
+        <p:blipFill>
+          <a:blip r:embed="rId2"/>
+          <a:stretch>
+            <a:fillRect/>
+          </a:stretch>
+        </p:blipFill>
+        <p:spPr>
+          <a:xfrm>
+            <a:off x="731520" y="914400"/>
+            <a:ext cx="4389120" cy="4389120"/>
+          </a:xfrm>
+          <a:prstGeom prst="rect">
+            <a:avLst/>
+          </a:prstGeom>
+        </p:spPr>
+      </p:pic>
+      <p:sp>
+        <p:nvSpPr>
+          <p:cNvPr id="6" name="Shape 2"/>
+          <p:cNvSpPr/>
+          <p:nvPr/>
+        </p:nvSpPr>
+        <p:spPr>
+          <a:xfrm>
+            <a:off x="5303520" y="594360"/>
+            <a:ext cx="5303520" cy="4389120"/>
+          </a:xfrm>
+          <a:prstGeom prst="roundRect">
+            <a:avLst>
+              <a:gd name="adj" fmla="val 2500"/>
+            </a:avLst>
+          </a:prstGeom>
+          <a:solidFill>
+            <a:srgbClr val="000000">
+              <a:alpha val="55000"/>
+            </a:srgbClr>
+          </a:solidFill>
+          <a:ln w="12700">
+            <a:solidFill>
+              <a:srgbClr val="FFFFFF">
+                <a:alpha val="0"/>
+              </a:srgbClr>
+            </a:solidFill>
+            <a:prstDash val="solid"/>
+          </a:ln>
+        </p:spPr>
+      </p:sp>
+      <p:sp>
+        <p:nvSpPr>
+          <p:cNvPr id="7" name="Text 3"/>
+          <p:cNvSpPr/>
+          <p:nvPr/>
+        </p:nvSpPr>
+        <p:spPr>
+          <a:xfrm>
+            <a:off x="5669280" y="822960"/>
+            <a:ext cx="5029200" cy="914400"/>
           </a:xfrm>
           <a:prstGeom prst="rect">
             <a:avLst/>
@@ -2357,10 +4199,12 @@
           <a:ln/>
         </p:spPr>
         <p:txBody>
-          <a:bodyPr wrap="square" rtlCol="0" anchor="ctr"/>
+          <a:bodyPr wrap="square" rtlCol="0" anchor="ctr">
+            <a:normAutofit/>
+          </a:bodyPr>
           <a:lstStyle/>
           <a:p>
-            <a:pPr algn="ctr" indent="0" marL="0">
+            <a:pPr indent="0" marL="0">
               <a:buNone/>
             </a:pPr>
             <a:r>
@@ -2372,7 +4216,7 @@
                 <a:ea typeface="Aptos" pitchFamily="34" charset="-122"/>
                 <a:cs typeface="Aptos" pitchFamily="34" charset="-120"/>
               </a:rPr>
-              <a:t>AI Evolyutsiyasi</a:t>
+              <a:t>Ishlab Chiqarish va AI</a:t>
             </a:r>
             <a:endParaRPr lang="en-US" sz="2400" dirty="0"/>
           </a:p>
@@ -2380,43 +4224,14 @@
       </p:sp>
       <p:sp>
         <p:nvSpPr>
-          <p:cNvPr id="6" name="Shape 3"/>
-          <p:cNvSpPr/>
-          <p:nvPr/>
-        </p:nvSpPr>
-        <p:spPr>
-          <a:xfrm>
-            <a:off x="731520" y="1645920"/>
-            <a:ext cx="10607040" cy="3474720"/>
-          </a:xfrm>
-          <a:prstGeom prst="roundRect">
-            <a:avLst>
-              <a:gd name="adj" fmla="val 3158"/>
-            </a:avLst>
-          </a:prstGeom>
-          <a:solidFill>
-            <a:srgbClr val="111827">
-              <a:alpha val="92000"/>
-            </a:srgbClr>
-          </a:solidFill>
-          <a:ln w="12700">
-            <a:solidFill>
-              <a:srgbClr val="F59E0B"/>
-            </a:solidFill>
-            <a:prstDash val="solid"/>
-          </a:ln>
-        </p:spPr>
-      </p:sp>
-      <p:sp>
-        <p:nvSpPr>
-          <p:cNvPr id="7" name="Text 4"/>
-          <p:cNvSpPr/>
-          <p:nvPr/>
-        </p:nvSpPr>
-        <p:spPr>
-          <a:xfrm>
-            <a:off x="1005840" y="1920240"/>
-            <a:ext cx="5943600" cy="2743200"/>
+          <p:cNvPr id="8" name="Text 4"/>
+          <p:cNvSpPr/>
+          <p:nvPr/>
+        </p:nvSpPr>
+        <p:spPr>
+          <a:xfrm>
+            <a:off x="5669280" y="1828800"/>
+            <a:ext cx="4937760" cy="3200400"/>
           </a:xfrm>
           <a:prstGeom prst="rect">
             <a:avLst/>
@@ -2442,8 +4257,14 @@
                 <a:ea typeface="Aptos" pitchFamily="34" charset="-122"/>
                 <a:cs typeface="Aptos" pitchFamily="34" charset="-120"/>
               </a:rPr>
-              <a:t>• AI kontseptsiyasi va ilk nazariyalar ⚛️</a:t>
+              <a:t>Sanoat tarmoqlari avtomatlashtirish orqali misli ko‘rilmagan samaradorlikka erishmoqda. 📈</a:t>
             </a:r>
+            <a:endParaRPr lang="en-US" sz="1500" dirty="0"/>
+          </a:p>
+          <a:p>
+            <a:pPr indent="0" marL="0">
+              <a:buNone/>
+            </a:pPr>
             <a:endParaRPr lang="en-US" sz="1500" dirty="0"/>
           </a:p>
           <a:p>
@@ -2459,7 +4280,7 @@
                 <a:ea typeface="Aptos" pitchFamily="34" charset="-122"/>
                 <a:cs typeface="Aptos" pitchFamily="34" charset="-120"/>
               </a:rPr>
-              <a:t>• Deep Learning va katta ma'lumotlar davri</a:t>
+              <a:t>Afzalliklar:</a:t>
             </a:r>
             <a:endParaRPr lang="en-US" sz="1500" dirty="0"/>
           </a:p>
@@ -2476,214 +4297,56 @@
                 <a:ea typeface="Aptos" pitchFamily="34" charset="-122"/>
                 <a:cs typeface="Aptos" pitchFamily="34" charset="-120"/>
               </a:rPr>
-              <a:t>• Generativ AI va universal modellar 🚀</a:t>
+              <a:t>• Xatolarni kamaytirish</a:t>
             </a:r>
             <a:endParaRPr lang="en-US" sz="1500" dirty="0"/>
           </a:p>
-        </p:txBody>
-      </p:sp>
-      <p:sp>
-        <p:nvSpPr>
-          <p:cNvPr id="8" name="Shape 5"/>
-          <p:cNvSpPr/>
-          <p:nvPr/>
-        </p:nvSpPr>
-        <p:spPr>
-          <a:xfrm>
-            <a:off x="7315200" y="4069080"/>
-            <a:ext cx="3200400" cy="868680"/>
-          </a:xfrm>
-          <a:prstGeom prst="roundRect">
-            <a:avLst>
-              <a:gd name="adj" fmla="val 8421"/>
-            </a:avLst>
-          </a:prstGeom>
-          <a:solidFill>
-            <a:srgbClr val="F59E0B">
-              <a:alpha val="82000"/>
-            </a:srgbClr>
-          </a:solidFill>
-          <a:ln w="12700">
-            <a:solidFill>
-              <a:srgbClr val="F59E0B"/>
-            </a:solidFill>
-            <a:prstDash val="solid"/>
-          </a:ln>
-        </p:spPr>
-      </p:sp>
-      <p:sp>
-        <p:nvSpPr>
-          <p:cNvPr id="9" name="Text 6"/>
-          <p:cNvSpPr/>
-          <p:nvPr/>
-        </p:nvSpPr>
-        <p:spPr>
-          <a:xfrm>
-            <a:off x="7452360" y="4233672"/>
-            <a:ext cx="2880360" cy="713232"/>
-          </a:xfrm>
-          <a:prstGeom prst="rect">
-            <a:avLst/>
-          </a:prstGeom>
-          <a:noFill/>
-          <a:ln/>
-        </p:spPr>
-        <p:txBody>
-          <a:bodyPr wrap="square" rtlCol="0" anchor="ctr">
-            <a:normAutofit/>
-          </a:bodyPr>
-          <a:lstStyle/>
           <a:p>
             <a:pPr indent="0" marL="0">
               <a:buNone/>
             </a:pPr>
             <a:r>
-              <a:rPr lang="en-US" sz="1000" b="1" dirty="0">
+              <a:rPr lang="en-US" sz="1500" dirty="0">
                 <a:solidFill>
-                  <a:srgbClr val="FFFFFF"/>
+                  <a:srgbClr val="E5E7EB"/>
                 </a:solidFill>
+                <a:latin typeface="Aptos" pitchFamily="34" charset="0"/>
+                <a:ea typeface="Aptos" pitchFamily="34" charset="-122"/>
+                <a:cs typeface="Aptos" pitchFamily="34" charset="-120"/>
               </a:rPr>
-              <a:t>📊 Birinchi AI dasturi 1951-yilda Christopher Strachey tomonidan yozilgan.</a:t>
+              <a:t>• Ishlab chiqarish tannarxini pasaytirish</a:t>
             </a:r>
-            <a:endParaRPr lang="en-US" sz="1000" dirty="0"/>
-          </a:p>
-        </p:txBody>
-      </p:sp>
-      <p:graphicFrame>
-        <p:nvGraphicFramePr>
-          <p:cNvPr id="10" name="Chart 0" descr=""/>
-          <p:cNvGraphicFramePr/>
-          <p:nvPr/>
-        </p:nvGraphicFramePr>
-        <p:xfrm>
-          <a:off x="7635240" y="2057400"/>
-          <a:ext cx="2194560" cy="1280160"/>
-        </p:xfrm>
-        <a:graphic xmlns:a="http://schemas.openxmlformats.org/drawingml/2006/main">
-          <a:graphicData uri="http://schemas.openxmlformats.org/drawingml/2006/chart">
-            <c:chart xmlns:c="http://schemas.openxmlformats.org/drawingml/2006/chart" r:id="rId2"/>
-          </a:graphicData>
-        </a:graphic>
-      </p:graphicFrame>
-      <p:sp>
-        <p:nvSpPr>
-          <p:cNvPr id="11" name="Shape 7"/>
-          <p:cNvSpPr/>
-          <p:nvPr/>
-        </p:nvSpPr>
-        <p:spPr>
-          <a:xfrm>
-            <a:off x="8778240" y="1828800"/>
-            <a:ext cx="0" cy="2194560"/>
-          </a:xfrm>
-          <a:prstGeom prst="line">
-            <a:avLst/>
-          </a:prstGeom>
-          <a:noFill/>
-          <a:ln w="31750">
-            <a:solidFill>
-              <a:srgbClr val="F59E0B"/>
-            </a:solidFill>
-            <a:prstDash val="solid"/>
-          </a:ln>
-        </p:spPr>
-      </p:sp>
-      <p:sp>
-        <p:nvSpPr>
-          <p:cNvPr id="12" name="Shape 8"/>
-          <p:cNvSpPr/>
-          <p:nvPr/>
-        </p:nvSpPr>
-        <p:spPr>
-          <a:xfrm>
-            <a:off x="8668512" y="1828800"/>
-            <a:ext cx="201168" cy="201168"/>
-          </a:xfrm>
-          <a:prstGeom prst="ellipse">
-            <a:avLst/>
-          </a:prstGeom>
-          <a:solidFill>
-            <a:srgbClr val="F59E0B"/>
-          </a:solidFill>
-          <a:ln w="12700">
-            <a:solidFill>
-              <a:srgbClr val="F59E0B"/>
-            </a:solidFill>
-            <a:prstDash val="solid"/>
-          </a:ln>
-        </p:spPr>
-      </p:sp>
-      <p:sp>
-        <p:nvSpPr>
-          <p:cNvPr id="13" name="Text 9"/>
-          <p:cNvSpPr/>
-          <p:nvPr/>
-        </p:nvSpPr>
-        <p:spPr>
-          <a:xfrm>
-            <a:off x="9052560" y="1801368"/>
-            <a:ext cx="274320" cy="182880"/>
-          </a:xfrm>
-          <a:prstGeom prst="rect">
-            <a:avLst/>
-          </a:prstGeom>
-          <a:noFill/>
-          <a:ln/>
-        </p:spPr>
-        <p:txBody>
-          <a:bodyPr wrap="square" rtlCol="0" anchor="ctr"/>
-          <a:lstStyle/>
+            <a:endParaRPr lang="en-US" sz="1500" dirty="0"/>
+          </a:p>
           <a:p>
             <a:pPr indent="0" marL="0">
               <a:buNone/>
             </a:pPr>
             <a:r>
-              <a:rPr lang="en-US" sz="1100" b="1" dirty="0">
+              <a:rPr lang="en-US" sz="1500" dirty="0">
                 <a:solidFill>
-                  <a:srgbClr val="FFFFFF"/>
+                  <a:srgbClr val="E5E7EB"/>
                 </a:solidFill>
+                <a:latin typeface="Aptos" pitchFamily="34" charset="0"/>
+                <a:ea typeface="Aptos" pitchFamily="34" charset="-122"/>
+                <a:cs typeface="Aptos" pitchFamily="34" charset="-120"/>
               </a:rPr>
-              <a:t>1</a:t>
+              <a:t>• 24/7 uzluksiz operatsiyalar</a:t>
             </a:r>
-            <a:endParaRPr lang="en-US" sz="1100" dirty="0"/>
+            <a:endParaRPr lang="en-US" sz="1500" dirty="0"/>
           </a:p>
         </p:txBody>
       </p:sp>
       <p:sp>
         <p:nvSpPr>
-          <p:cNvPr id="14" name="Shape 10"/>
-          <p:cNvSpPr/>
-          <p:nvPr/>
-        </p:nvSpPr>
-        <p:spPr>
-          <a:xfrm>
-            <a:off x="8668512" y="2743200"/>
-            <a:ext cx="201168" cy="201168"/>
-          </a:xfrm>
-          <a:prstGeom prst="ellipse">
-            <a:avLst/>
-          </a:prstGeom>
-          <a:solidFill>
-            <a:srgbClr val="F59E0B"/>
-          </a:solidFill>
-          <a:ln w="12700">
-            <a:solidFill>
-              <a:srgbClr val="F59E0B"/>
-            </a:solidFill>
-            <a:prstDash val="solid"/>
-          </a:ln>
-        </p:spPr>
-      </p:sp>
-      <p:sp>
-        <p:nvSpPr>
-          <p:cNvPr id="15" name="Text 11"/>
-          <p:cNvSpPr/>
-          <p:nvPr/>
-        </p:nvSpPr>
-        <p:spPr>
-          <a:xfrm>
-            <a:off x="9052560" y="2715768"/>
-            <a:ext cx="274320" cy="182880"/>
+          <p:cNvPr id="9" name="Text 5"/>
+          <p:cNvSpPr/>
+          <p:nvPr/>
+        </p:nvSpPr>
+        <p:spPr>
+          <a:xfrm>
+            <a:off x="10241280" y="685800"/>
+            <a:ext cx="457200" cy="457200"/>
           </a:xfrm>
           <a:prstGeom prst="rect">
             <a:avLst/>
@@ -2699,203 +4362,23 @@
               <a:buNone/>
             </a:pPr>
             <a:r>
-              <a:rPr lang="en-US" sz="1100" b="1" dirty="0">
+              <a:rPr lang="en-US" sz="2200" dirty="0">
                 <a:solidFill>
-                  <a:srgbClr val="FFFFFF"/>
+                  <a:srgbClr val="000000"/>
                 </a:solidFill>
+                <a:latin typeface="Segoe UI Emoji" pitchFamily="34" charset="0"/>
+                <a:ea typeface="Segoe UI Emoji" pitchFamily="34" charset="-122"/>
+                <a:cs typeface="Segoe UI Emoji" pitchFamily="34" charset="-120"/>
               </a:rPr>
-              <a:t>2</a:t>
+              <a:t>⚡</a:t>
             </a:r>
-            <a:endParaRPr lang="en-US" sz="1100" dirty="0"/>
+            <a:endParaRPr lang="en-US" sz="2200" dirty="0"/>
           </a:p>
         </p:txBody>
       </p:sp>
       <p:sp>
         <p:nvSpPr>
-          <p:cNvPr id="16" name="Shape 12"/>
-          <p:cNvSpPr/>
-          <p:nvPr/>
-        </p:nvSpPr>
-        <p:spPr>
-          <a:xfrm>
-            <a:off x="8668512" y="3657600"/>
-            <a:ext cx="201168" cy="201168"/>
-          </a:xfrm>
-          <a:prstGeom prst="ellipse">
-            <a:avLst/>
-          </a:prstGeom>
-          <a:solidFill>
-            <a:srgbClr val="F59E0B"/>
-          </a:solidFill>
-          <a:ln w="12700">
-            <a:solidFill>
-              <a:srgbClr val="F59E0B"/>
-            </a:solidFill>
-            <a:prstDash val="solid"/>
-          </a:ln>
-        </p:spPr>
-      </p:sp>
-      <p:sp>
-        <p:nvSpPr>
-          <p:cNvPr id="17" name="Text 13"/>
-          <p:cNvSpPr/>
-          <p:nvPr/>
-        </p:nvSpPr>
-        <p:spPr>
-          <a:xfrm>
-            <a:off x="9052560" y="3630168"/>
-            <a:ext cx="274320" cy="182880"/>
-          </a:xfrm>
-          <a:prstGeom prst="rect">
-            <a:avLst/>
-          </a:prstGeom>
-          <a:noFill/>
-          <a:ln/>
-        </p:spPr>
-        <p:txBody>
-          <a:bodyPr wrap="square" rtlCol="0" anchor="ctr"/>
-          <a:lstStyle/>
-          <a:p>
-            <a:pPr indent="0" marL="0">
-              <a:buNone/>
-            </a:pPr>
-            <a:r>
-              <a:rPr lang="en-US" sz="1100" b="1" dirty="0">
-                <a:solidFill>
-                  <a:srgbClr val="FFFFFF"/>
-                </a:solidFill>
-              </a:rPr>
-              <a:t>3</a:t>
-            </a:r>
-            <a:endParaRPr lang="en-US" sz="1100" dirty="0"/>
-          </a:p>
-        </p:txBody>
-      </p:sp>
-      <p:sp>
-        <p:nvSpPr>
-          <p:cNvPr id="18" name="Shape 14"/>
-          <p:cNvSpPr/>
-          <p:nvPr/>
-        </p:nvSpPr>
-        <p:spPr>
-          <a:xfrm>
-            <a:off x="9235440" y="3017520"/>
-            <a:ext cx="0" cy="731520"/>
-          </a:xfrm>
-          <a:prstGeom prst="line">
-            <a:avLst/>
-          </a:prstGeom>
-          <a:noFill/>
-          <a:ln w="25400">
-            <a:solidFill>
-              <a:srgbClr val="F59E0B"/>
-            </a:solidFill>
-            <a:prstDash val="solid"/>
-          </a:ln>
-        </p:spPr>
-      </p:sp>
-      <p:sp>
-        <p:nvSpPr>
-          <p:cNvPr id="19" name="Shape 15"/>
-          <p:cNvSpPr/>
-          <p:nvPr/>
-        </p:nvSpPr>
-        <p:spPr>
-          <a:xfrm>
-            <a:off x="8412480" y="2651760"/>
-            <a:ext cx="164592" cy="164592"/>
-          </a:xfrm>
-          <a:prstGeom prst="ellipse">
-            <a:avLst/>
-          </a:prstGeom>
-          <a:solidFill>
-            <a:srgbClr val="F59E0B"/>
-          </a:solidFill>
-          <a:ln w="12700">
-            <a:solidFill>
-              <a:srgbClr val="F59E0B"/>
-            </a:solidFill>
-            <a:prstDash val="solid"/>
-          </a:ln>
-        </p:spPr>
-      </p:sp>
-      <p:sp>
-        <p:nvSpPr>
-          <p:cNvPr id="20" name="Shape 16"/>
-          <p:cNvSpPr/>
-          <p:nvPr/>
-        </p:nvSpPr>
-        <p:spPr>
-          <a:xfrm>
-            <a:off x="9235440" y="2651760"/>
-            <a:ext cx="164592" cy="164592"/>
-          </a:xfrm>
-          <a:prstGeom prst="ellipse">
-            <a:avLst/>
-          </a:prstGeom>
-          <a:solidFill>
-            <a:srgbClr val="F59E0B"/>
-          </a:solidFill>
-          <a:ln w="12700">
-            <a:solidFill>
-              <a:srgbClr val="F59E0B"/>
-            </a:solidFill>
-            <a:prstDash val="solid"/>
-          </a:ln>
-        </p:spPr>
-      </p:sp>
-      <p:sp>
-        <p:nvSpPr>
-          <p:cNvPr id="21" name="Shape 17"/>
-          <p:cNvSpPr/>
-          <p:nvPr/>
-        </p:nvSpPr>
-        <p:spPr>
-          <a:xfrm>
-            <a:off x="10058400" y="2651760"/>
-            <a:ext cx="164592" cy="164592"/>
-          </a:xfrm>
-          <a:prstGeom prst="ellipse">
-            <a:avLst/>
-          </a:prstGeom>
-          <a:solidFill>
-            <a:srgbClr val="F59E0B"/>
-          </a:solidFill>
-          <a:ln w="12700">
-            <a:solidFill>
-              <a:srgbClr val="F59E0B"/>
-            </a:solidFill>
-            <a:prstDash val="solid"/>
-          </a:ln>
-        </p:spPr>
-      </p:sp>
-      <p:pic>
-        <p:nvPicPr>
-          <p:cNvPr id="22" name="Image 1" descr="https://images.pexels.com/photos/25626518/pexels-photo-25626518.jpeg?auto=compress&amp;cs=tinysrgb&amp;dpr=2&amp;h=650&amp;w=940">    </p:cNvPr>
-          <p:cNvPicPr>
-            <a:picLocks noChangeAspect="1"/>
-          </p:cNvPicPr>
-          <p:nvPr/>
-        </p:nvPicPr>
-        <p:blipFill>
-          <a:blip r:embed="rId3"/>
-          <a:stretch>
-            <a:fillRect/>
-          </a:stretch>
-        </p:blipFill>
-        <p:spPr>
-          <a:xfrm>
-            <a:off x="8138160" y="1828800"/>
-            <a:ext cx="2286000" cy="1920240"/>
-          </a:xfrm>
-          <a:prstGeom prst="rect">
-            <a:avLst/>
-          </a:prstGeom>
-        </p:spPr>
-      </p:pic>
-      <p:sp>
-        <p:nvSpPr>
-          <p:cNvPr id="23" name="Text 18"/>
+          <p:cNvPr id="10" name="Text 6"/>
           <p:cNvSpPr/>
           <p:nvPr/>
         </p:nvSpPr>
@@ -2956,7 +4439,7 @@
       </p:grpSpPr>
       <p:pic>
         <p:nvPicPr>
-          <p:cNvPr id="2" name="Image 0" descr="https://images.pexels.com/photos/373543/pexels-photo-373543.jpeg?auto=compress&amp;cs=tinysrgb&amp;dpr=2&amp;h=650&amp;w=940">    </p:cNvPr>
+          <p:cNvPr id="2" name="Image 0" descr="https://images.pexels.com/photos/27141317/pexels-photo-27141317.jpeg?auto=compress&amp;cs=tinysrgb&amp;dpr=2&amp;h=650&amp;w=940">    </p:cNvPr>
           <p:cNvPicPr>
             <a:picLocks noChangeAspect="1"/>
           </p:cNvPicPr>
@@ -3022,11 +4505,11 @@
             <a:avLst/>
           </a:prstGeom>
           <a:solidFill>
-            <a:srgbClr val="22C55E"/>
+            <a:srgbClr val="3B82F6"/>
           </a:solidFill>
           <a:ln w="12700">
             <a:solidFill>
-              <a:srgbClr val="22C55E"/>
+              <a:srgbClr val="3B82F6"/>
             </a:solidFill>
             <a:prstDash val="solid"/>
           </a:ln>
@@ -3065,7 +4548,7 @@
                 <a:ea typeface="Aptos" pitchFamily="34" charset="-122"/>
                 <a:cs typeface="Aptos" pitchFamily="34" charset="-120"/>
               </a:rPr>
-              <a:t>Kelajakka Nigoh</a:t>
+              <a:t>Strategik Imkoniyatlar</a:t>
             </a:r>
             <a:endParaRPr lang="en-US" sz="2400" dirty="0"/>
           </a:p>
@@ -3094,7 +4577,1170 @@
           </a:solidFill>
           <a:ln w="12700">
             <a:solidFill>
-              <a:srgbClr val="22C55E"/>
+              <a:srgbClr val="3B82F6"/>
+            </a:solidFill>
+            <a:prstDash val="solid"/>
+          </a:ln>
+        </p:spPr>
+      </p:sp>
+      <p:sp>
+        <p:nvSpPr>
+          <p:cNvPr id="7" name="Text 4"/>
+          <p:cNvSpPr/>
+          <p:nvPr/>
+        </p:nvSpPr>
+        <p:spPr>
+          <a:xfrm>
+            <a:off x="1005840" y="1920240"/>
+            <a:ext cx="5943600" cy="2743200"/>
+          </a:xfrm>
+          <a:prstGeom prst="rect">
+            <a:avLst/>
+          </a:prstGeom>
+          <a:noFill/>
+          <a:ln/>
+        </p:spPr>
+        <p:txBody>
+          <a:bodyPr wrap="square" rtlCol="0" anchor="ctr">
+            <a:normAutofit/>
+          </a:bodyPr>
+          <a:lstStyle/>
+          <a:p>
+            <a:pPr indent="0" marL="0">
+              <a:buNone/>
+            </a:pPr>
+            <a:r>
+              <a:rPr lang="en-US" sz="1500" dirty="0">
+                <a:solidFill>
+                  <a:srgbClr val="DBEAFE"/>
+                </a:solidFill>
+                <a:latin typeface="Aptos" pitchFamily="34" charset="0"/>
+                <a:ea typeface="Aptos" pitchFamily="34" charset="-122"/>
+                <a:cs typeface="Aptos" pitchFamily="34" charset="-120"/>
+              </a:rPr>
+              <a:t>Sunʼiy intellekt kompaniyalarga raqobatbardosh ustunlik taqdim etadi.</a:t>
+            </a:r>
+            <a:endParaRPr lang="en-US" sz="1500" dirty="0"/>
+          </a:p>
+        </p:txBody>
+      </p:sp>
+      <p:sp>
+        <p:nvSpPr>
+          <p:cNvPr id="8" name="Shape 5"/>
+          <p:cNvSpPr/>
+          <p:nvPr/>
+        </p:nvSpPr>
+        <p:spPr>
+          <a:xfrm>
+            <a:off x="7315200" y="4069080"/>
+            <a:ext cx="3200400" cy="868680"/>
+          </a:xfrm>
+          <a:prstGeom prst="roundRect">
+            <a:avLst>
+              <a:gd name="adj" fmla="val 8421"/>
+            </a:avLst>
+          </a:prstGeom>
+          <a:solidFill>
+            <a:srgbClr val="3B82F6">
+              <a:alpha val="82000"/>
+            </a:srgbClr>
+          </a:solidFill>
+          <a:ln w="12700">
+            <a:solidFill>
+              <a:srgbClr val="3B82F6"/>
+            </a:solidFill>
+            <a:prstDash val="solid"/>
+          </a:ln>
+        </p:spPr>
+      </p:sp>
+      <p:sp>
+        <p:nvSpPr>
+          <p:cNvPr id="9" name="Text 6"/>
+          <p:cNvSpPr/>
+          <p:nvPr/>
+        </p:nvSpPr>
+        <p:spPr>
+          <a:xfrm>
+            <a:off x="7452360" y="4233672"/>
+            <a:ext cx="2880360" cy="713232"/>
+          </a:xfrm>
+          <a:prstGeom prst="rect">
+            <a:avLst/>
+          </a:prstGeom>
+          <a:noFill/>
+          <a:ln/>
+        </p:spPr>
+        <p:txBody>
+          <a:bodyPr wrap="square" rtlCol="0" anchor="ctr">
+            <a:normAutofit/>
+          </a:bodyPr>
+          <a:lstStyle/>
+          <a:p>
+            <a:pPr indent="0" marL="0">
+              <a:buNone/>
+            </a:pPr>
+            <a:r>
+              <a:rPr lang="en-US" sz="1000" b="1" dirty="0">
+                <a:solidFill>
+                  <a:srgbClr val="FFFFFF"/>
+                </a:solidFill>
+              </a:rPr>
+              <a:t>📊 AI qabul qilingan qarorlar aniqligini sezilarli darajada oshiradi.</a:t>
+            </a:r>
+            <a:endParaRPr lang="en-US" sz="1000" dirty="0"/>
+          </a:p>
+        </p:txBody>
+      </p:sp>
+      <p:graphicFrame>
+        <p:nvGraphicFramePr>
+          <p:cNvPr id="10" name="Chart 0" descr=""/>
+          <p:cNvGraphicFramePr/>
+          <p:nvPr/>
+        </p:nvGraphicFramePr>
+        <p:xfrm>
+          <a:off x="7635240" y="2057400"/>
+          <a:ext cx="2194560" cy="1280160"/>
+        </p:xfrm>
+        <a:graphic xmlns:a="http://schemas.openxmlformats.org/drawingml/2006/main">
+          <a:graphicData uri="http://schemas.openxmlformats.org/drawingml/2006/chart">
+            <c:chart xmlns:c="http://schemas.openxmlformats.org/drawingml/2006/chart" r:id="rId2"/>
+          </a:graphicData>
+        </a:graphic>
+      </p:graphicFrame>
+      <p:sp>
+        <p:nvSpPr>
+          <p:cNvPr id="11" name="Shape 7"/>
+          <p:cNvSpPr/>
+          <p:nvPr/>
+        </p:nvSpPr>
+        <p:spPr>
+          <a:xfrm>
+            <a:off x="9235440" y="3017520"/>
+            <a:ext cx="0" cy="731520"/>
+          </a:xfrm>
+          <a:prstGeom prst="line">
+            <a:avLst/>
+          </a:prstGeom>
+          <a:noFill/>
+          <a:ln w="25400">
+            <a:solidFill>
+              <a:srgbClr val="3B82F6"/>
+            </a:solidFill>
+            <a:prstDash val="solid"/>
+          </a:ln>
+        </p:spPr>
+      </p:sp>
+      <p:sp>
+        <p:nvSpPr>
+          <p:cNvPr id="12" name="Shape 8"/>
+          <p:cNvSpPr/>
+          <p:nvPr/>
+        </p:nvSpPr>
+        <p:spPr>
+          <a:xfrm>
+            <a:off x="8412480" y="2651760"/>
+            <a:ext cx="164592" cy="164592"/>
+          </a:xfrm>
+          <a:prstGeom prst="ellipse">
+            <a:avLst/>
+          </a:prstGeom>
+          <a:solidFill>
+            <a:srgbClr val="3B82F6"/>
+          </a:solidFill>
+          <a:ln w="12700">
+            <a:solidFill>
+              <a:srgbClr val="3B82F6"/>
+            </a:solidFill>
+            <a:prstDash val="solid"/>
+          </a:ln>
+        </p:spPr>
+      </p:sp>
+      <p:sp>
+        <p:nvSpPr>
+          <p:cNvPr id="13" name="Shape 9"/>
+          <p:cNvSpPr/>
+          <p:nvPr/>
+        </p:nvSpPr>
+        <p:spPr>
+          <a:xfrm>
+            <a:off x="9235440" y="2651760"/>
+            <a:ext cx="164592" cy="164592"/>
+          </a:xfrm>
+          <a:prstGeom prst="ellipse">
+            <a:avLst/>
+          </a:prstGeom>
+          <a:solidFill>
+            <a:srgbClr val="3B82F6"/>
+          </a:solidFill>
+          <a:ln w="12700">
+            <a:solidFill>
+              <a:srgbClr val="3B82F6"/>
+            </a:solidFill>
+            <a:prstDash val="solid"/>
+          </a:ln>
+        </p:spPr>
+      </p:sp>
+      <p:sp>
+        <p:nvSpPr>
+          <p:cNvPr id="14" name="Shape 10"/>
+          <p:cNvSpPr/>
+          <p:nvPr/>
+        </p:nvSpPr>
+        <p:spPr>
+          <a:xfrm>
+            <a:off x="10058400" y="2651760"/>
+            <a:ext cx="164592" cy="164592"/>
+          </a:xfrm>
+          <a:prstGeom prst="ellipse">
+            <a:avLst/>
+          </a:prstGeom>
+          <a:solidFill>
+            <a:srgbClr val="3B82F6"/>
+          </a:solidFill>
+          <a:ln w="12700">
+            <a:solidFill>
+              <a:srgbClr val="3B82F6"/>
+            </a:solidFill>
+            <a:prstDash val="solid"/>
+          </a:ln>
+        </p:spPr>
+      </p:sp>
+      <p:pic>
+        <p:nvPicPr>
+          <p:cNvPr id="15" name="Image 1" descr="https://images.pexels.com/photos/27141317/pexels-photo-27141317.jpeg?auto=compress&amp;cs=tinysrgb&amp;dpr=2&amp;h=650&amp;w=940">    </p:cNvPr>
+          <p:cNvPicPr>
+            <a:picLocks noChangeAspect="1"/>
+          </p:cNvPicPr>
+          <p:nvPr/>
+        </p:nvPicPr>
+        <p:blipFill>
+          <a:blip r:embed="rId3"/>
+          <a:stretch>
+            <a:fillRect/>
+          </a:stretch>
+        </p:blipFill>
+        <p:spPr>
+          <a:xfrm>
+            <a:off x="8138160" y="1828800"/>
+            <a:ext cx="2286000" cy="1920240"/>
+          </a:xfrm>
+          <a:prstGeom prst="rect">
+            <a:avLst/>
+          </a:prstGeom>
+        </p:spPr>
+      </p:pic>
+      <p:sp>
+        <p:nvSpPr>
+          <p:cNvPr id="16" name="Text 11"/>
+          <p:cNvSpPr/>
+          <p:nvPr/>
+        </p:nvSpPr>
+        <p:spPr>
+          <a:xfrm>
+            <a:off x="10972800" y="6217920"/>
+            <a:ext cx="365760" cy="182880"/>
+          </a:xfrm>
+          <a:prstGeom prst="rect">
+            <a:avLst/>
+          </a:prstGeom>
+          <a:noFill/>
+          <a:ln/>
+        </p:spPr>
+        <p:txBody>
+          <a:bodyPr wrap="square" rtlCol="0" anchor="ctr"/>
+          <a:lstStyle/>
+          <a:p>
+            <a:pPr indent="0" marL="0">
+              <a:buNone/>
+            </a:pPr>
+            <a:r>
+              <a:rPr lang="en-US" sz="1000" dirty="0">
+                <a:solidFill>
+                  <a:srgbClr val="94A3B8"/>
+                </a:solidFill>
+              </a:rPr>
+              <a:t>4</a:t>
+            </a:r>
+            <a:endParaRPr lang="en-US" sz="1000" dirty="0"/>
+          </a:p>
+        </p:txBody>
+      </p:sp>
+    </p:spTree>
+  </p:cSld>
+  <p:clrMapOvr>
+    <a:masterClrMapping/>
+  </p:clrMapOvr>
+</p:sld>
+</file>
+
+<file path=ppt/slides/slide5.xml><?xml version="1.0" encoding="utf-8"?>
+<p:sld xmlns:a="http://schemas.openxmlformats.org/drawingml/2006/main" xmlns:r="http://schemas.openxmlformats.org/officeDocument/2006/relationships" xmlns:p="http://schemas.openxmlformats.org/presentationml/2006/main">
+  <p:cSld name="Slide 5">
+    <p:spTree>
+      <p:nvGrpSpPr>
+        <p:cNvPr id="1" name=""/>
+        <p:cNvGrpSpPr/>
+        <p:nvPr/>
+      </p:nvGrpSpPr>
+      <p:grpSpPr>
+        <a:xfrm>
+          <a:off x="0" y="0"/>
+          <a:ext cx="0" cy="0"/>
+          <a:chOff x="0" y="0"/>
+          <a:chExt cx="0" cy="0"/>
+        </a:xfrm>
+      </p:grpSpPr>
+      <p:pic>
+        <p:nvPicPr>
+          <p:cNvPr id="2" name="Image 0" descr="https://images.pexels.com/photos/32728014/pexels-photo-32728014.jpeg?auto=compress&amp;cs=tinysrgb&amp;dpr=2&amp;h=650&amp;w=940">    </p:cNvPr>
+          <p:cNvPicPr>
+            <a:picLocks noChangeAspect="1"/>
+          </p:cNvPicPr>
+          <p:nvPr/>
+        </p:nvPicPr>
+        <p:blipFill>
+          <a:blip r:embed="rId1"/>
+          <a:stretch>
+            <a:fillRect/>
+          </a:stretch>
+        </p:blipFill>
+        <p:spPr>
+          <a:xfrm>
+            <a:off x="0" y="0"/>
+            <a:ext cx="12188952" cy="6858000"/>
+          </a:xfrm>
+          <a:prstGeom prst="rect">
+            <a:avLst/>
+          </a:prstGeom>
+        </p:spPr>
+      </p:pic>
+      <p:sp>
+        <p:nvSpPr>
+          <p:cNvPr id="3" name="Shape 0"/>
+          <p:cNvSpPr/>
+          <p:nvPr/>
+        </p:nvSpPr>
+        <p:spPr>
+          <a:xfrm>
+            <a:off x="0" y="0"/>
+            <a:ext cx="12188952" cy="6858000"/>
+          </a:xfrm>
+          <a:prstGeom prst="rect">
+            <a:avLst/>
+          </a:prstGeom>
+          <a:solidFill>
+            <a:srgbClr val="000000">
+              <a:alpha val="35000"/>
+            </a:srgbClr>
+          </a:solidFill>
+          <a:ln w="12700">
+            <a:solidFill>
+              <a:srgbClr val="000000">
+                <a:alpha val="0"/>
+              </a:srgbClr>
+            </a:solidFill>
+            <a:prstDash val="solid"/>
+          </a:ln>
+        </p:spPr>
+      </p:sp>
+      <p:sp>
+        <p:nvSpPr>
+          <p:cNvPr id="4" name="Shape 1"/>
+          <p:cNvSpPr/>
+          <p:nvPr/>
+        </p:nvSpPr>
+        <p:spPr>
+          <a:xfrm>
+            <a:off x="0" y="0"/>
+            <a:ext cx="12188952" cy="73152"/>
+          </a:xfrm>
+          <a:prstGeom prst="rect">
+            <a:avLst/>
+          </a:prstGeom>
+          <a:solidFill>
+            <a:srgbClr val="A855F7"/>
+          </a:solidFill>
+          <a:ln w="12700">
+            <a:solidFill>
+              <a:srgbClr val="A855F7"/>
+            </a:solidFill>
+            <a:prstDash val="solid"/>
+          </a:ln>
+        </p:spPr>
+      </p:sp>
+      <p:sp>
+        <p:nvSpPr>
+          <p:cNvPr id="5" name="Text 2"/>
+          <p:cNvSpPr/>
+          <p:nvPr/>
+        </p:nvSpPr>
+        <p:spPr>
+          <a:xfrm>
+            <a:off x="731520" y="640080"/>
+            <a:ext cx="10515600" cy="731520"/>
+          </a:xfrm>
+          <a:prstGeom prst="rect">
+            <a:avLst/>
+          </a:prstGeom>
+          <a:noFill/>
+          <a:ln/>
+        </p:spPr>
+        <p:txBody>
+          <a:bodyPr wrap="square" rtlCol="0" anchor="ctr"/>
+          <a:lstStyle/>
+          <a:p>
+            <a:pPr algn="ctr" indent="0" marL="0">
+              <a:buNone/>
+            </a:pPr>
+            <a:r>
+              <a:rPr lang="en-US" sz="2400" b="1" dirty="0">
+                <a:solidFill>
+                  <a:srgbClr val="FFFFFF"/>
+                </a:solidFill>
+                <a:latin typeface="Aptos" pitchFamily="34" charset="0"/>
+                <a:ea typeface="Aptos" pitchFamily="34" charset="-122"/>
+                <a:cs typeface="Aptos" pitchFamily="34" charset="-120"/>
+              </a:rPr>
+              <a:t>AI Evolyutsiyasi</a:t>
+            </a:r>
+            <a:endParaRPr lang="en-US" sz="2400" dirty="0"/>
+          </a:p>
+        </p:txBody>
+      </p:sp>
+      <p:sp>
+        <p:nvSpPr>
+          <p:cNvPr id="6" name="Shape 3"/>
+          <p:cNvSpPr/>
+          <p:nvPr/>
+        </p:nvSpPr>
+        <p:spPr>
+          <a:xfrm>
+            <a:off x="731520" y="1645920"/>
+            <a:ext cx="10607040" cy="3474720"/>
+          </a:xfrm>
+          <a:prstGeom prst="roundRect">
+            <a:avLst>
+              <a:gd name="adj" fmla="val 3158"/>
+            </a:avLst>
+          </a:prstGeom>
+          <a:solidFill>
+            <a:srgbClr val="111827">
+              <a:alpha val="92000"/>
+            </a:srgbClr>
+          </a:solidFill>
+          <a:ln w="12700">
+            <a:solidFill>
+              <a:srgbClr val="A855F7"/>
+            </a:solidFill>
+            <a:prstDash val="solid"/>
+          </a:ln>
+        </p:spPr>
+      </p:sp>
+      <p:sp>
+        <p:nvSpPr>
+          <p:cNvPr id="7" name="Text 4"/>
+          <p:cNvSpPr/>
+          <p:nvPr/>
+        </p:nvSpPr>
+        <p:spPr>
+          <a:xfrm>
+            <a:off x="1005840" y="1920240"/>
+            <a:ext cx="5943600" cy="2743200"/>
+          </a:xfrm>
+          <a:prstGeom prst="rect">
+            <a:avLst/>
+          </a:prstGeom>
+          <a:noFill/>
+          <a:ln/>
+        </p:spPr>
+        <p:txBody>
+          <a:bodyPr wrap="square" rtlCol="0" anchor="ctr">
+            <a:normAutofit/>
+          </a:bodyPr>
+          <a:lstStyle/>
+          <a:p>
+            <a:pPr indent="0" marL="0">
+              <a:buNone/>
+            </a:pPr>
+            <a:r>
+              <a:rPr lang="en-US" sz="1500" dirty="0">
+                <a:solidFill>
+                  <a:srgbClr val="DDD6FE"/>
+                </a:solidFill>
+                <a:latin typeface="Aptos" pitchFamily="34" charset="0"/>
+                <a:ea typeface="Aptos" pitchFamily="34" charset="-122"/>
+                <a:cs typeface="Aptos" pitchFamily="34" charset="-120"/>
+              </a:rPr>
+              <a:t>Texnologiyaning rivojlanish bosqichlari: </a:t>
+            </a:r>
+            <a:endParaRPr lang="en-US" sz="1500" dirty="0"/>
+          </a:p>
+          <a:p>
+            <a:pPr indent="0" marL="0">
+              <a:buNone/>
+            </a:pPr>
+            <a:r>
+              <a:rPr lang="en-US" sz="1500" dirty="0">
+                <a:solidFill>
+                  <a:srgbClr val="DDD6FE"/>
+                </a:solidFill>
+                <a:latin typeface="Aptos" pitchFamily="34" charset="0"/>
+                <a:ea typeface="Aptos" pitchFamily="34" charset="-122"/>
+                <a:cs typeface="Aptos" pitchFamily="34" charset="-120"/>
+              </a:rPr>
+              <a:t>1. 1950-yillar: Nazariy asoslar</a:t>
+            </a:r>
+            <a:endParaRPr lang="en-US" sz="1500" dirty="0"/>
+          </a:p>
+          <a:p>
+            <a:pPr indent="0" marL="0">
+              <a:buNone/>
+            </a:pPr>
+            <a:r>
+              <a:rPr lang="en-US" sz="1500" dirty="0">
+                <a:solidFill>
+                  <a:srgbClr val="DDD6FE"/>
+                </a:solidFill>
+                <a:latin typeface="Aptos" pitchFamily="34" charset="0"/>
+                <a:ea typeface="Aptos" pitchFamily="34" charset="-122"/>
+                <a:cs typeface="Aptos" pitchFamily="34" charset="-120"/>
+              </a:rPr>
+              <a:t>2. 2010-yillar: Deep Learning portlashi</a:t>
+            </a:r>
+            <a:endParaRPr lang="en-US" sz="1500" dirty="0"/>
+          </a:p>
+          <a:p>
+            <a:pPr indent="0" marL="0">
+              <a:buNone/>
+            </a:pPr>
+            <a:r>
+              <a:rPr lang="en-US" sz="1500" dirty="0">
+                <a:solidFill>
+                  <a:srgbClr val="DDD6FE"/>
+                </a:solidFill>
+                <a:latin typeface="Aptos" pitchFamily="34" charset="0"/>
+                <a:ea typeface="Aptos" pitchFamily="34" charset="-122"/>
+                <a:cs typeface="Aptos" pitchFamily="34" charset="-120"/>
+              </a:rPr>
+              <a:t>3. Hozirgi davr: Generativ AI inqilobi</a:t>
+            </a:r>
+            <a:endParaRPr lang="en-US" sz="1500" dirty="0"/>
+          </a:p>
+        </p:txBody>
+      </p:sp>
+      <p:sp>
+        <p:nvSpPr>
+          <p:cNvPr id="8" name="Shape 5"/>
+          <p:cNvSpPr/>
+          <p:nvPr/>
+        </p:nvSpPr>
+        <p:spPr>
+          <a:xfrm>
+            <a:off x="7315200" y="4069080"/>
+            <a:ext cx="3200400" cy="868680"/>
+          </a:xfrm>
+          <a:prstGeom prst="roundRect">
+            <a:avLst>
+              <a:gd name="adj" fmla="val 8421"/>
+            </a:avLst>
+          </a:prstGeom>
+          <a:solidFill>
+            <a:srgbClr val="A855F7">
+              <a:alpha val="82000"/>
+            </a:srgbClr>
+          </a:solidFill>
+          <a:ln w="12700">
+            <a:solidFill>
+              <a:srgbClr val="A855F7"/>
+            </a:solidFill>
+            <a:prstDash val="solid"/>
+          </a:ln>
+        </p:spPr>
+      </p:sp>
+      <p:sp>
+        <p:nvSpPr>
+          <p:cNvPr id="9" name="Text 6"/>
+          <p:cNvSpPr/>
+          <p:nvPr/>
+        </p:nvSpPr>
+        <p:spPr>
+          <a:xfrm>
+            <a:off x="7452360" y="4233672"/>
+            <a:ext cx="2880360" cy="713232"/>
+          </a:xfrm>
+          <a:prstGeom prst="rect">
+            <a:avLst/>
+          </a:prstGeom>
+          <a:noFill/>
+          <a:ln/>
+        </p:spPr>
+        <p:txBody>
+          <a:bodyPr wrap="square" rtlCol="0" anchor="ctr">
+            <a:normAutofit/>
+          </a:bodyPr>
+          <a:lstStyle/>
+          <a:p>
+            <a:pPr indent="0" marL="0">
+              <a:buNone/>
+            </a:pPr>
+            <a:r>
+              <a:rPr lang="en-US" sz="1000" b="1" dirty="0">
+                <a:solidFill>
+                  <a:srgbClr val="FFFFFF"/>
+                </a:solidFill>
+              </a:rPr>
+              <a:t>📊 So'nggi 3 yilda AI modellarining quvvati 100 barobar o'sdi.</a:t>
+            </a:r>
+            <a:endParaRPr lang="en-US" sz="1000" dirty="0"/>
+          </a:p>
+        </p:txBody>
+      </p:sp>
+      <p:graphicFrame>
+        <p:nvGraphicFramePr>
+          <p:cNvPr id="10" name="Chart 0" descr=""/>
+          <p:cNvGraphicFramePr/>
+          <p:nvPr/>
+        </p:nvGraphicFramePr>
+        <p:xfrm>
+          <a:off x="7635240" y="2057400"/>
+          <a:ext cx="2194560" cy="1280160"/>
+        </p:xfrm>
+        <a:graphic xmlns:a="http://schemas.openxmlformats.org/drawingml/2006/main">
+          <a:graphicData uri="http://schemas.openxmlformats.org/drawingml/2006/chart">
+            <c:chart xmlns:c="http://schemas.openxmlformats.org/drawingml/2006/chart" r:id="rId2"/>
+          </a:graphicData>
+        </a:graphic>
+      </p:graphicFrame>
+      <p:sp>
+        <p:nvSpPr>
+          <p:cNvPr id="11" name="Shape 7"/>
+          <p:cNvSpPr/>
+          <p:nvPr/>
+        </p:nvSpPr>
+        <p:spPr>
+          <a:xfrm>
+            <a:off x="8778240" y="1828800"/>
+            <a:ext cx="0" cy="2194560"/>
+          </a:xfrm>
+          <a:prstGeom prst="line">
+            <a:avLst/>
+          </a:prstGeom>
+          <a:noFill/>
+          <a:ln w="31750">
+            <a:solidFill>
+              <a:srgbClr val="A855F7"/>
+            </a:solidFill>
+            <a:prstDash val="solid"/>
+          </a:ln>
+        </p:spPr>
+      </p:sp>
+      <p:sp>
+        <p:nvSpPr>
+          <p:cNvPr id="12" name="Shape 8"/>
+          <p:cNvSpPr/>
+          <p:nvPr/>
+        </p:nvSpPr>
+        <p:spPr>
+          <a:xfrm>
+            <a:off x="8668512" y="1828800"/>
+            <a:ext cx="201168" cy="201168"/>
+          </a:xfrm>
+          <a:prstGeom prst="ellipse">
+            <a:avLst/>
+          </a:prstGeom>
+          <a:solidFill>
+            <a:srgbClr val="A855F7"/>
+          </a:solidFill>
+          <a:ln w="12700">
+            <a:solidFill>
+              <a:srgbClr val="A855F7"/>
+            </a:solidFill>
+            <a:prstDash val="solid"/>
+          </a:ln>
+        </p:spPr>
+      </p:sp>
+      <p:sp>
+        <p:nvSpPr>
+          <p:cNvPr id="13" name="Text 9"/>
+          <p:cNvSpPr/>
+          <p:nvPr/>
+        </p:nvSpPr>
+        <p:spPr>
+          <a:xfrm>
+            <a:off x="9052560" y="1801368"/>
+            <a:ext cx="274320" cy="182880"/>
+          </a:xfrm>
+          <a:prstGeom prst="rect">
+            <a:avLst/>
+          </a:prstGeom>
+          <a:noFill/>
+          <a:ln/>
+        </p:spPr>
+        <p:txBody>
+          <a:bodyPr wrap="square" rtlCol="0" anchor="ctr"/>
+          <a:lstStyle/>
+          <a:p>
+            <a:pPr indent="0" marL="0">
+              <a:buNone/>
+            </a:pPr>
+            <a:r>
+              <a:rPr lang="en-US" sz="1100" b="1" dirty="0">
+                <a:solidFill>
+                  <a:srgbClr val="FFFFFF"/>
+                </a:solidFill>
+              </a:rPr>
+              <a:t>1</a:t>
+            </a:r>
+            <a:endParaRPr lang="en-US" sz="1100" dirty="0"/>
+          </a:p>
+        </p:txBody>
+      </p:sp>
+      <p:sp>
+        <p:nvSpPr>
+          <p:cNvPr id="14" name="Shape 10"/>
+          <p:cNvSpPr/>
+          <p:nvPr/>
+        </p:nvSpPr>
+        <p:spPr>
+          <a:xfrm>
+            <a:off x="8668512" y="2743200"/>
+            <a:ext cx="201168" cy="201168"/>
+          </a:xfrm>
+          <a:prstGeom prst="ellipse">
+            <a:avLst/>
+          </a:prstGeom>
+          <a:solidFill>
+            <a:srgbClr val="A855F7"/>
+          </a:solidFill>
+          <a:ln w="12700">
+            <a:solidFill>
+              <a:srgbClr val="A855F7"/>
+            </a:solidFill>
+            <a:prstDash val="solid"/>
+          </a:ln>
+        </p:spPr>
+      </p:sp>
+      <p:sp>
+        <p:nvSpPr>
+          <p:cNvPr id="15" name="Text 11"/>
+          <p:cNvSpPr/>
+          <p:nvPr/>
+        </p:nvSpPr>
+        <p:spPr>
+          <a:xfrm>
+            <a:off x="9052560" y="2715768"/>
+            <a:ext cx="274320" cy="182880"/>
+          </a:xfrm>
+          <a:prstGeom prst="rect">
+            <a:avLst/>
+          </a:prstGeom>
+          <a:noFill/>
+          <a:ln/>
+        </p:spPr>
+        <p:txBody>
+          <a:bodyPr wrap="square" rtlCol="0" anchor="ctr"/>
+          <a:lstStyle/>
+          <a:p>
+            <a:pPr indent="0" marL="0">
+              <a:buNone/>
+            </a:pPr>
+            <a:r>
+              <a:rPr lang="en-US" sz="1100" b="1" dirty="0">
+                <a:solidFill>
+                  <a:srgbClr val="FFFFFF"/>
+                </a:solidFill>
+              </a:rPr>
+              <a:t>2</a:t>
+            </a:r>
+            <a:endParaRPr lang="en-US" sz="1100" dirty="0"/>
+          </a:p>
+        </p:txBody>
+      </p:sp>
+      <p:sp>
+        <p:nvSpPr>
+          <p:cNvPr id="16" name="Shape 12"/>
+          <p:cNvSpPr/>
+          <p:nvPr/>
+        </p:nvSpPr>
+        <p:spPr>
+          <a:xfrm>
+            <a:off x="8668512" y="3657600"/>
+            <a:ext cx="201168" cy="201168"/>
+          </a:xfrm>
+          <a:prstGeom prst="ellipse">
+            <a:avLst/>
+          </a:prstGeom>
+          <a:solidFill>
+            <a:srgbClr val="A855F7"/>
+          </a:solidFill>
+          <a:ln w="12700">
+            <a:solidFill>
+              <a:srgbClr val="A855F7"/>
+            </a:solidFill>
+            <a:prstDash val="solid"/>
+          </a:ln>
+        </p:spPr>
+      </p:sp>
+      <p:sp>
+        <p:nvSpPr>
+          <p:cNvPr id="17" name="Text 13"/>
+          <p:cNvSpPr/>
+          <p:nvPr/>
+        </p:nvSpPr>
+        <p:spPr>
+          <a:xfrm>
+            <a:off x="9052560" y="3630168"/>
+            <a:ext cx="274320" cy="182880"/>
+          </a:xfrm>
+          <a:prstGeom prst="rect">
+            <a:avLst/>
+          </a:prstGeom>
+          <a:noFill/>
+          <a:ln/>
+        </p:spPr>
+        <p:txBody>
+          <a:bodyPr wrap="square" rtlCol="0" anchor="ctr"/>
+          <a:lstStyle/>
+          <a:p>
+            <a:pPr indent="0" marL="0">
+              <a:buNone/>
+            </a:pPr>
+            <a:r>
+              <a:rPr lang="en-US" sz="1100" b="1" dirty="0">
+                <a:solidFill>
+                  <a:srgbClr val="FFFFFF"/>
+                </a:solidFill>
+              </a:rPr>
+              <a:t>3</a:t>
+            </a:r>
+            <a:endParaRPr lang="en-US" sz="1100" dirty="0"/>
+          </a:p>
+        </p:txBody>
+      </p:sp>
+      <p:sp>
+        <p:nvSpPr>
+          <p:cNvPr id="18" name="Shape 14"/>
+          <p:cNvSpPr/>
+          <p:nvPr/>
+        </p:nvSpPr>
+        <p:spPr>
+          <a:xfrm>
+            <a:off x="9235440" y="3017520"/>
+            <a:ext cx="0" cy="731520"/>
+          </a:xfrm>
+          <a:prstGeom prst="line">
+            <a:avLst/>
+          </a:prstGeom>
+          <a:noFill/>
+          <a:ln w="25400">
+            <a:solidFill>
+              <a:srgbClr val="A855F7"/>
+            </a:solidFill>
+            <a:prstDash val="solid"/>
+          </a:ln>
+        </p:spPr>
+      </p:sp>
+      <p:sp>
+        <p:nvSpPr>
+          <p:cNvPr id="19" name="Shape 15"/>
+          <p:cNvSpPr/>
+          <p:nvPr/>
+        </p:nvSpPr>
+        <p:spPr>
+          <a:xfrm>
+            <a:off x="8412480" y="2651760"/>
+            <a:ext cx="164592" cy="164592"/>
+          </a:xfrm>
+          <a:prstGeom prst="ellipse">
+            <a:avLst/>
+          </a:prstGeom>
+          <a:solidFill>
+            <a:srgbClr val="A855F7"/>
+          </a:solidFill>
+          <a:ln w="12700">
+            <a:solidFill>
+              <a:srgbClr val="A855F7"/>
+            </a:solidFill>
+            <a:prstDash val="solid"/>
+          </a:ln>
+        </p:spPr>
+      </p:sp>
+      <p:sp>
+        <p:nvSpPr>
+          <p:cNvPr id="20" name="Shape 16"/>
+          <p:cNvSpPr/>
+          <p:nvPr/>
+        </p:nvSpPr>
+        <p:spPr>
+          <a:xfrm>
+            <a:off x="9235440" y="2651760"/>
+            <a:ext cx="164592" cy="164592"/>
+          </a:xfrm>
+          <a:prstGeom prst="ellipse">
+            <a:avLst/>
+          </a:prstGeom>
+          <a:solidFill>
+            <a:srgbClr val="A855F7"/>
+          </a:solidFill>
+          <a:ln w="12700">
+            <a:solidFill>
+              <a:srgbClr val="A855F7"/>
+            </a:solidFill>
+            <a:prstDash val="solid"/>
+          </a:ln>
+        </p:spPr>
+      </p:sp>
+      <p:sp>
+        <p:nvSpPr>
+          <p:cNvPr id="21" name="Shape 17"/>
+          <p:cNvSpPr/>
+          <p:nvPr/>
+        </p:nvSpPr>
+        <p:spPr>
+          <a:xfrm>
+            <a:off x="10058400" y="2651760"/>
+            <a:ext cx="164592" cy="164592"/>
+          </a:xfrm>
+          <a:prstGeom prst="ellipse">
+            <a:avLst/>
+          </a:prstGeom>
+          <a:solidFill>
+            <a:srgbClr val="A855F7"/>
+          </a:solidFill>
+          <a:ln w="12700">
+            <a:solidFill>
+              <a:srgbClr val="A855F7"/>
+            </a:solidFill>
+            <a:prstDash val="solid"/>
+          </a:ln>
+        </p:spPr>
+      </p:sp>
+      <p:pic>
+        <p:nvPicPr>
+          <p:cNvPr id="22" name="Image 1" descr="https://images.pexels.com/photos/32728014/pexels-photo-32728014.jpeg?auto=compress&amp;cs=tinysrgb&amp;dpr=2&amp;h=650&amp;w=940">    </p:cNvPr>
+          <p:cNvPicPr>
+            <a:picLocks noChangeAspect="1"/>
+          </p:cNvPicPr>
+          <p:nvPr/>
+        </p:nvPicPr>
+        <p:blipFill>
+          <a:blip r:embed="rId3"/>
+          <a:stretch>
+            <a:fillRect/>
+          </a:stretch>
+        </p:blipFill>
+        <p:spPr>
+          <a:xfrm>
+            <a:off x="8138160" y="1828800"/>
+            <a:ext cx="2286000" cy="1920240"/>
+          </a:xfrm>
+          <a:prstGeom prst="rect">
+            <a:avLst/>
+          </a:prstGeom>
+        </p:spPr>
+      </p:pic>
+      <p:sp>
+        <p:nvSpPr>
+          <p:cNvPr id="23" name="Text 18"/>
+          <p:cNvSpPr/>
+          <p:nvPr/>
+        </p:nvSpPr>
+        <p:spPr>
+          <a:xfrm>
+            <a:off x="10972800" y="6217920"/>
+            <a:ext cx="365760" cy="182880"/>
+          </a:xfrm>
+          <a:prstGeom prst="rect">
+            <a:avLst/>
+          </a:prstGeom>
+          <a:noFill/>
+          <a:ln/>
+        </p:spPr>
+        <p:txBody>
+          <a:bodyPr wrap="square" rtlCol="0" anchor="ctr"/>
+          <a:lstStyle/>
+          <a:p>
+            <a:pPr indent="0" marL="0">
+              <a:buNone/>
+            </a:pPr>
+            <a:r>
+              <a:rPr lang="en-US" sz="1000" dirty="0">
+                <a:solidFill>
+                  <a:srgbClr val="94A3B8"/>
+                </a:solidFill>
+              </a:rPr>
+              <a:t>5</a:t>
+            </a:r>
+            <a:endParaRPr lang="en-US" sz="1000" dirty="0"/>
+          </a:p>
+        </p:txBody>
+      </p:sp>
+    </p:spTree>
+  </p:cSld>
+  <p:clrMapOvr>
+    <a:masterClrMapping/>
+  </p:clrMapOvr>
+</p:sld>
+</file>
+
+<file path=ppt/slides/slide6.xml><?xml version="1.0" encoding="utf-8"?>
+<p:sld xmlns:a="http://schemas.openxmlformats.org/drawingml/2006/main" xmlns:r="http://schemas.openxmlformats.org/officeDocument/2006/relationships" xmlns:p="http://schemas.openxmlformats.org/presentationml/2006/main">
+  <p:cSld name="Slide 6">
+    <p:spTree>
+      <p:nvGrpSpPr>
+        <p:cNvPr id="1" name=""/>
+        <p:cNvGrpSpPr/>
+        <p:nvPr/>
+      </p:nvGrpSpPr>
+      <p:grpSpPr>
+        <a:xfrm>
+          <a:off x="0" y="0"/>
+          <a:ext cx="0" cy="0"/>
+          <a:chOff x="0" y="0"/>
+          <a:chExt cx="0" cy="0"/>
+        </a:xfrm>
+      </p:grpSpPr>
+      <p:pic>
+        <p:nvPicPr>
+          <p:cNvPr id="2" name="Image 0" descr="https://images.pexels.com/photos/30547584/pexels-photo-30547584.jpeg?auto=compress&amp;cs=tinysrgb&amp;dpr=2&amp;h=650&amp;w=940">    </p:cNvPr>
+          <p:cNvPicPr>
+            <a:picLocks noChangeAspect="1"/>
+          </p:cNvPicPr>
+          <p:nvPr/>
+        </p:nvPicPr>
+        <p:blipFill>
+          <a:blip r:embed="rId1"/>
+          <a:stretch>
+            <a:fillRect/>
+          </a:stretch>
+        </p:blipFill>
+        <p:spPr>
+          <a:xfrm>
+            <a:off x="0" y="0"/>
+            <a:ext cx="12188952" cy="6858000"/>
+          </a:xfrm>
+          <a:prstGeom prst="rect">
+            <a:avLst/>
+          </a:prstGeom>
+        </p:spPr>
+      </p:pic>
+      <p:sp>
+        <p:nvSpPr>
+          <p:cNvPr id="3" name="Shape 0"/>
+          <p:cNvSpPr/>
+          <p:nvPr/>
+        </p:nvSpPr>
+        <p:spPr>
+          <a:xfrm>
+            <a:off x="0" y="0"/>
+            <a:ext cx="12188952" cy="6858000"/>
+          </a:xfrm>
+          <a:prstGeom prst="rect">
+            <a:avLst/>
+          </a:prstGeom>
+          <a:solidFill>
+            <a:srgbClr val="000000">
+              <a:alpha val="35000"/>
+            </a:srgbClr>
+          </a:solidFill>
+          <a:ln w="12700">
+            <a:solidFill>
+              <a:srgbClr val="000000">
+                <a:alpha val="0"/>
+              </a:srgbClr>
+            </a:solidFill>
+            <a:prstDash val="solid"/>
+          </a:ln>
+        </p:spPr>
+      </p:sp>
+      <p:sp>
+        <p:nvSpPr>
+          <p:cNvPr id="4" name="Shape 1"/>
+          <p:cNvSpPr/>
+          <p:nvPr/>
+        </p:nvSpPr>
+        <p:spPr>
+          <a:xfrm>
+            <a:off x="0" y="0"/>
+            <a:ext cx="12188952" cy="73152"/>
+          </a:xfrm>
+          <a:prstGeom prst="rect">
+            <a:avLst/>
+          </a:prstGeom>
+          <a:solidFill>
+            <a:srgbClr val="00D9FF"/>
+          </a:solidFill>
+          <a:ln w="12700">
+            <a:solidFill>
+              <a:srgbClr val="00D9FF"/>
+            </a:solidFill>
+            <a:prstDash val="solid"/>
+          </a:ln>
+        </p:spPr>
+      </p:sp>
+      <p:sp>
+        <p:nvSpPr>
+          <p:cNvPr id="5" name="Text 2"/>
+          <p:cNvSpPr/>
+          <p:nvPr/>
+        </p:nvSpPr>
+        <p:spPr>
+          <a:xfrm>
+            <a:off x="731520" y="640080"/>
+            <a:ext cx="10515600" cy="731520"/>
+          </a:xfrm>
+          <a:prstGeom prst="rect">
+            <a:avLst/>
+          </a:prstGeom>
+          <a:noFill/>
+          <a:ln/>
+        </p:spPr>
+        <p:txBody>
+          <a:bodyPr wrap="square" rtlCol="0" anchor="ctr"/>
+          <a:lstStyle/>
+          <a:p>
+            <a:pPr algn="ctr" indent="0" marL="0">
+              <a:buNone/>
+            </a:pPr>
+            <a:r>
+              <a:rPr lang="en-US" sz="2400" b="1" dirty="0">
+                <a:solidFill>
+                  <a:srgbClr val="FFFFFF"/>
+                </a:solidFill>
+                <a:latin typeface="Aptos" pitchFamily="34" charset="0"/>
+                <a:ea typeface="Aptos" pitchFamily="34" charset="-122"/>
+                <a:cs typeface="Aptos" pitchFamily="34" charset="-120"/>
+              </a:rPr>
+              <a:t>Asosiy Funktsiyalar</a:t>
+            </a:r>
+            <a:endParaRPr lang="en-US" sz="2400" dirty="0"/>
+          </a:p>
+        </p:txBody>
+      </p:sp>
+      <p:sp>
+        <p:nvSpPr>
+          <p:cNvPr id="6" name="Shape 3"/>
+          <p:cNvSpPr/>
+          <p:nvPr/>
+        </p:nvSpPr>
+        <p:spPr>
+          <a:xfrm>
+            <a:off x="731520" y="1645920"/>
+            <a:ext cx="10607040" cy="3474720"/>
+          </a:xfrm>
+          <a:prstGeom prst="roundRect">
+            <a:avLst>
+              <a:gd name="adj" fmla="val 3158"/>
+            </a:avLst>
+          </a:prstGeom>
+          <a:solidFill>
+            <a:srgbClr val="111827">
+              <a:alpha val="92000"/>
+            </a:srgbClr>
+          </a:solidFill>
+          <a:ln w="12700">
+            <a:solidFill>
+              <a:srgbClr val="00D9FF"/>
             </a:solidFill>
             <a:prstDash val="solid"/>
           </a:ln>
@@ -3135,7 +5781,7 @@
                 <a:ea typeface="Aptos" pitchFamily="34" charset="-122"/>
                 <a:cs typeface="Aptos" pitchFamily="34" charset="-120"/>
               </a:rPr>
-              <a:t>Sun'iy intellekt shunchaki vosita emas, balki innovatsiyalar o'chog'idir. Biz xavfsiz va axloqiy AI integratsiyasiga intilishimiz kerak. 🌍</a:t>
+              <a:t>Sunʼiy intellektning imkoniyatlari keng:</a:t>
             </a:r>
             <a:endParaRPr lang="en-US" sz="1500" dirty="0"/>
           </a:p>
@@ -3158,13 +5804,13 @@
             </a:avLst>
           </a:prstGeom>
           <a:solidFill>
-            <a:srgbClr val="22C55E">
+            <a:srgbClr val="00D9FF">
               <a:alpha val="82000"/>
             </a:srgbClr>
           </a:solidFill>
           <a:ln w="12700">
             <a:solidFill>
-              <a:srgbClr val="22C55E"/>
+              <a:srgbClr val="00D9FF"/>
             </a:solidFill>
             <a:prstDash val="solid"/>
           </a:ln>
@@ -3202,7 +5848,7 @@
                   <a:srgbClr val="FFFFFF"/>
                 </a:solidFill>
               </a:rPr>
-              <a:t>📊 2025-yilda kompaniyalarning 90% i AI texnologiyalaridan foydalanadi.</a:t>
+              <a:t>📊 AI dunyo bo'ylab 50 dan ortiq sohada faol qo'llanilmoqda.</a:t>
             </a:r>
             <a:endParaRPr lang="en-US" sz="1000" dirty="0"/>
           </a:p>
@@ -3241,7 +5887,7 @@
           <a:noFill/>
           <a:ln w="25400">
             <a:solidFill>
-              <a:srgbClr val="22C55E"/>
+              <a:srgbClr val="00D9FF"/>
             </a:solidFill>
             <a:prstDash val="solid"/>
           </a:ln>
@@ -3262,11 +5908,11 @@
             <a:avLst/>
           </a:prstGeom>
           <a:solidFill>
-            <a:srgbClr val="22C55E"/>
+            <a:srgbClr val="00D9FF"/>
           </a:solidFill>
           <a:ln w="12700">
             <a:solidFill>
-              <a:srgbClr val="22C55E"/>
+              <a:srgbClr val="00D9FF"/>
             </a:solidFill>
             <a:prstDash val="solid"/>
           </a:ln>
@@ -3287,11 +5933,11 @@
             <a:avLst/>
           </a:prstGeom>
           <a:solidFill>
-            <a:srgbClr val="22C55E"/>
+            <a:srgbClr val="00D9FF"/>
           </a:solidFill>
           <a:ln w="12700">
             <a:solidFill>
-              <a:srgbClr val="22C55E"/>
+              <a:srgbClr val="00D9FF"/>
             </a:solidFill>
             <a:prstDash val="solid"/>
           </a:ln>
@@ -3312,11 +5958,11 @@
             <a:avLst/>
           </a:prstGeom>
           <a:solidFill>
-            <a:srgbClr val="22C55E"/>
+            <a:srgbClr val="00D9FF"/>
           </a:solidFill>
           <a:ln w="12700">
             <a:solidFill>
-              <a:srgbClr val="22C55E"/>
+              <a:srgbClr val="00D9FF"/>
             </a:solidFill>
             <a:prstDash val="solid"/>
           </a:ln>
@@ -3324,7 +5970,7 @@
       </p:sp>
       <p:pic>
         <p:nvPicPr>
-          <p:cNvPr id="15" name="Image 1" descr="https://images.pexels.com/photos/373543/pexels-photo-373543.jpeg?auto=compress&amp;cs=tinysrgb&amp;dpr=2&amp;h=650&amp;w=940">    </p:cNvPr>
+          <p:cNvPr id="15" name="Image 1" descr="https://images.pexels.com/photos/30547584/pexels-photo-30547584.jpeg?auto=compress&amp;cs=tinysrgb&amp;dpr=2&amp;h=650&amp;w=940">    </p:cNvPr>
           <p:cNvPicPr>
             <a:picLocks noChangeAspect="1"/>
           </p:cNvPicPr>
@@ -3376,7 +6022,1066 @@
                   <a:srgbClr val="94A3B8"/>
                 </a:solidFill>
               </a:rPr>
-              <a:t>4</a:t>
+              <a:t>6</a:t>
+            </a:r>
+            <a:endParaRPr lang="en-US" sz="1000" dirty="0"/>
+          </a:p>
+        </p:txBody>
+      </p:sp>
+    </p:spTree>
+  </p:cSld>
+  <p:clrMapOvr>
+    <a:masterClrMapping/>
+  </p:clrMapOvr>
+</p:sld>
+</file>
+
+<file path=ppt/slides/slide7.xml><?xml version="1.0" encoding="utf-8"?>
+<p:sld xmlns:a="http://schemas.openxmlformats.org/drawingml/2006/main" xmlns:r="http://schemas.openxmlformats.org/officeDocument/2006/relationships" xmlns:p="http://schemas.openxmlformats.org/presentationml/2006/main">
+  <p:cSld name="Slide 7">
+    <p:spTree>
+      <p:nvGrpSpPr>
+        <p:cNvPr id="1" name=""/>
+        <p:cNvGrpSpPr/>
+        <p:nvPr/>
+      </p:nvGrpSpPr>
+      <p:grpSpPr>
+        <a:xfrm>
+          <a:off x="0" y="0"/>
+          <a:ext cx="0" cy="0"/>
+          <a:chOff x="0" y="0"/>
+          <a:chExt cx="0" cy="0"/>
+        </a:xfrm>
+      </p:grpSpPr>
+      <p:pic>
+        <p:nvPicPr>
+          <p:cNvPr id="2" name="Image 0" descr="https://images.pexels.com/photos/9494918/pexels-photo-9494918.jpeg?auto=compress&amp;cs=tinysrgb&amp;dpr=2&amp;h=650&amp;w=940">    </p:cNvPr>
+          <p:cNvPicPr>
+            <a:picLocks noChangeAspect="1"/>
+          </p:cNvPicPr>
+          <p:nvPr/>
+        </p:nvPicPr>
+        <p:blipFill>
+          <a:blip r:embed="rId1"/>
+          <a:stretch>
+            <a:fillRect/>
+          </a:stretch>
+        </p:blipFill>
+        <p:spPr>
+          <a:xfrm>
+            <a:off x="0" y="0"/>
+            <a:ext cx="12188952" cy="6858000"/>
+          </a:xfrm>
+          <a:prstGeom prst="rect">
+            <a:avLst/>
+          </a:prstGeom>
+        </p:spPr>
+      </p:pic>
+      <p:sp>
+        <p:nvSpPr>
+          <p:cNvPr id="3" name="Shape 0"/>
+          <p:cNvSpPr/>
+          <p:nvPr/>
+        </p:nvSpPr>
+        <p:spPr>
+          <a:xfrm>
+            <a:off x="0" y="0"/>
+            <a:ext cx="12188952" cy="6858000"/>
+          </a:xfrm>
+          <a:prstGeom prst="rect">
+            <a:avLst/>
+          </a:prstGeom>
+          <a:solidFill>
+            <a:srgbClr val="000000">
+              <a:alpha val="35000"/>
+            </a:srgbClr>
+          </a:solidFill>
+          <a:ln w="12700">
+            <a:solidFill>
+              <a:srgbClr val="000000">
+                <a:alpha val="0"/>
+              </a:srgbClr>
+            </a:solidFill>
+            <a:prstDash val="solid"/>
+          </a:ln>
+        </p:spPr>
+      </p:sp>
+      <p:sp>
+        <p:nvSpPr>
+          <p:cNvPr id="4" name="Shape 1"/>
+          <p:cNvSpPr/>
+          <p:nvPr/>
+        </p:nvSpPr>
+        <p:spPr>
+          <a:xfrm>
+            <a:off x="0" y="0"/>
+            <a:ext cx="12188952" cy="73152"/>
+          </a:xfrm>
+          <a:prstGeom prst="rect">
+            <a:avLst/>
+          </a:prstGeom>
+          <a:solidFill>
+            <a:srgbClr val="00D9FF"/>
+          </a:solidFill>
+          <a:ln w="12700">
+            <a:solidFill>
+              <a:srgbClr val="00D9FF"/>
+            </a:solidFill>
+            <a:prstDash val="solid"/>
+          </a:ln>
+        </p:spPr>
+      </p:sp>
+      <p:sp>
+        <p:nvSpPr>
+          <p:cNvPr id="5" name="Shape 2"/>
+          <p:cNvSpPr/>
+          <p:nvPr/>
+        </p:nvSpPr>
+        <p:spPr>
+          <a:xfrm>
+            <a:off x="914400" y="1463040"/>
+            <a:ext cx="10241280" cy="3840480"/>
+          </a:xfrm>
+          <a:prstGeom prst="roundRect">
+            <a:avLst>
+              <a:gd name="adj" fmla="val 2857"/>
+            </a:avLst>
+          </a:prstGeom>
+          <a:solidFill>
+            <a:srgbClr val="111827">
+              <a:alpha val="80000"/>
+            </a:srgbClr>
+          </a:solidFill>
+          <a:ln w="12700">
+            <a:solidFill>
+              <a:srgbClr val="00D9FF"/>
+            </a:solidFill>
+            <a:prstDash val="solid"/>
+          </a:ln>
+        </p:spPr>
+      </p:sp>
+      <p:sp>
+        <p:nvSpPr>
+          <p:cNvPr id="6" name="Text 3"/>
+          <p:cNvSpPr/>
+          <p:nvPr/>
+        </p:nvSpPr>
+        <p:spPr>
+          <a:xfrm>
+            <a:off x="1097280" y="1737360"/>
+            <a:ext cx="9144000" cy="640080"/>
+          </a:xfrm>
+          <a:prstGeom prst="rect">
+            <a:avLst/>
+          </a:prstGeom>
+          <a:noFill/>
+          <a:ln/>
+        </p:spPr>
+        <p:txBody>
+          <a:bodyPr wrap="square" rtlCol="0" anchor="ctr"/>
+          <a:lstStyle/>
+          <a:p>
+            <a:pPr algn="ctr" indent="0" marL="0">
+              <a:buNone/>
+            </a:pPr>
+            <a:r>
+              <a:rPr lang="en-US" sz="2400" b="1" dirty="0">
+                <a:solidFill>
+                  <a:srgbClr val="FFFFFF"/>
+                </a:solidFill>
+              </a:rPr>
+              <a:t>Global Iqtisodiy Ta'sir</a:t>
+            </a:r>
+            <a:endParaRPr lang="en-US" sz="2400" dirty="0"/>
+          </a:p>
+        </p:txBody>
+      </p:sp>
+      <p:sp>
+        <p:nvSpPr>
+          <p:cNvPr id="7" name="Text 4"/>
+          <p:cNvSpPr/>
+          <p:nvPr/>
+        </p:nvSpPr>
+        <p:spPr>
+          <a:xfrm>
+            <a:off x="1371600" y="2560320"/>
+            <a:ext cx="8686800" cy="2011680"/>
+          </a:xfrm>
+          <a:prstGeom prst="rect">
+            <a:avLst/>
+          </a:prstGeom>
+          <a:noFill/>
+          <a:ln/>
+        </p:spPr>
+        <p:txBody>
+          <a:bodyPr wrap="square" rtlCol="0" anchor="ctr">
+            <a:normAutofit/>
+          </a:bodyPr>
+          <a:lstStyle/>
+          <a:p>
+            <a:pPr algn="l" indent="0" marL="0">
+              <a:buNone/>
+            </a:pPr>
+            <a:r>
+              <a:rPr lang="en-US" sz="1600" dirty="0">
+                <a:solidFill>
+                  <a:srgbClr val="CBD5E1"/>
+                </a:solidFill>
+              </a:rPr>
+              <a:t>AI iqtisodiy o'sishning asosiy drayveriga aylanmoqda. 🌍</a:t>
+            </a:r>
+            <a:endParaRPr lang="en-US" sz="1600" dirty="0"/>
+          </a:p>
+        </p:txBody>
+      </p:sp>
+      <p:pic>
+        <p:nvPicPr>
+          <p:cNvPr id="8" name="Image 1" descr="https://images.pexels.com/photos/9494918/pexels-photo-9494918.jpeg?auto=compress&amp;cs=tinysrgb&amp;dpr=2&amp;h=650&amp;w=940">    </p:cNvPr>
+          <p:cNvPicPr>
+            <a:picLocks noChangeAspect="1"/>
+          </p:cNvPicPr>
+          <p:nvPr/>
+        </p:nvPicPr>
+        <p:blipFill>
+          <a:blip r:embed="rId2"/>
+          <a:stretch>
+            <a:fillRect/>
+          </a:stretch>
+        </p:blipFill>
+        <p:spPr>
+          <a:xfrm>
+            <a:off x="8686800" y="1828800"/>
+            <a:ext cx="1828800" cy="1828800"/>
+          </a:xfrm>
+          <a:prstGeom prst="rect">
+            <a:avLst/>
+          </a:prstGeom>
+        </p:spPr>
+      </p:pic>
+      <p:sp>
+        <p:nvSpPr>
+          <p:cNvPr id="9" name="Text 5"/>
+          <p:cNvSpPr/>
+          <p:nvPr/>
+        </p:nvSpPr>
+        <p:spPr>
+          <a:xfrm>
+            <a:off x="10972800" y="6217920"/>
+            <a:ext cx="365760" cy="182880"/>
+          </a:xfrm>
+          <a:prstGeom prst="rect">
+            <a:avLst/>
+          </a:prstGeom>
+          <a:noFill/>
+          <a:ln/>
+        </p:spPr>
+        <p:txBody>
+          <a:bodyPr wrap="square" rtlCol="0" anchor="ctr"/>
+          <a:lstStyle/>
+          <a:p>
+            <a:pPr indent="0" marL="0">
+              <a:buNone/>
+            </a:pPr>
+            <a:r>
+              <a:rPr lang="en-US" sz="1000" dirty="0">
+                <a:solidFill>
+                  <a:srgbClr val="94A3B8"/>
+                </a:solidFill>
+              </a:rPr>
+              <a:t>7</a:t>
+            </a:r>
+            <a:endParaRPr lang="en-US" sz="1000" dirty="0"/>
+          </a:p>
+        </p:txBody>
+      </p:sp>
+    </p:spTree>
+  </p:cSld>
+  <p:clrMapOvr>
+    <a:masterClrMapping/>
+  </p:clrMapOvr>
+</p:sld>
+</file>
+
+<file path=ppt/slides/slide8.xml><?xml version="1.0" encoding="utf-8"?>
+<p:sld xmlns:a="http://schemas.openxmlformats.org/drawingml/2006/main" xmlns:r="http://schemas.openxmlformats.org/officeDocument/2006/relationships" xmlns:p="http://schemas.openxmlformats.org/presentationml/2006/main">
+  <p:cSld name="Slide 8">
+    <p:spTree>
+      <p:nvGrpSpPr>
+        <p:cNvPr id="1" name=""/>
+        <p:cNvGrpSpPr/>
+        <p:nvPr/>
+      </p:nvGrpSpPr>
+      <p:grpSpPr>
+        <a:xfrm>
+          <a:off x="0" y="0"/>
+          <a:ext cx="0" cy="0"/>
+          <a:chOff x="0" y="0"/>
+          <a:chExt cx="0" cy="0"/>
+        </a:xfrm>
+      </p:grpSpPr>
+      <p:pic>
+        <p:nvPicPr>
+          <p:cNvPr id="2" name="Image 0" descr="https://images.pexels.com/photos/8386434/pexels-photo-8386434.jpeg?auto=compress&amp;cs=tinysrgb&amp;dpr=2&amp;h=650&amp;w=940">    </p:cNvPr>
+          <p:cNvPicPr>
+            <a:picLocks noChangeAspect="1"/>
+          </p:cNvPicPr>
+          <p:nvPr/>
+        </p:nvPicPr>
+        <p:blipFill>
+          <a:blip r:embed="rId1"/>
+          <a:stretch>
+            <a:fillRect/>
+          </a:stretch>
+        </p:blipFill>
+        <p:spPr>
+          <a:xfrm>
+            <a:off x="0" y="0"/>
+            <a:ext cx="12188952" cy="6858000"/>
+          </a:xfrm>
+          <a:prstGeom prst="rect">
+            <a:avLst/>
+          </a:prstGeom>
+        </p:spPr>
+      </p:pic>
+      <p:sp>
+        <p:nvSpPr>
+          <p:cNvPr id="3" name="Shape 0"/>
+          <p:cNvSpPr/>
+          <p:nvPr/>
+        </p:nvSpPr>
+        <p:spPr>
+          <a:xfrm>
+            <a:off x="0" y="0"/>
+            <a:ext cx="12188952" cy="6858000"/>
+          </a:xfrm>
+          <a:prstGeom prst="rect">
+            <a:avLst/>
+          </a:prstGeom>
+          <a:solidFill>
+            <a:srgbClr val="000000">
+              <a:alpha val="35000"/>
+            </a:srgbClr>
+          </a:solidFill>
+          <a:ln w="12700">
+            <a:solidFill>
+              <a:srgbClr val="000000">
+                <a:alpha val="0"/>
+              </a:srgbClr>
+            </a:solidFill>
+            <a:prstDash val="solid"/>
+          </a:ln>
+        </p:spPr>
+      </p:sp>
+      <p:sp>
+        <p:nvSpPr>
+          <p:cNvPr id="4" name="Shape 1"/>
+          <p:cNvSpPr/>
+          <p:nvPr/>
+        </p:nvSpPr>
+        <p:spPr>
+          <a:xfrm>
+            <a:off x="0" y="0"/>
+            <a:ext cx="12188952" cy="73152"/>
+          </a:xfrm>
+          <a:prstGeom prst="rect">
+            <a:avLst/>
+          </a:prstGeom>
+          <a:solidFill>
+            <a:srgbClr val="F59E0B"/>
+          </a:solidFill>
+          <a:ln w="12700">
+            <a:solidFill>
+              <a:srgbClr val="F59E0B"/>
+            </a:solidFill>
+            <a:prstDash val="solid"/>
+          </a:ln>
+        </p:spPr>
+      </p:sp>
+      <p:sp>
+        <p:nvSpPr>
+          <p:cNvPr id="5" name="Shape 2"/>
+          <p:cNvSpPr/>
+          <p:nvPr/>
+        </p:nvSpPr>
+        <p:spPr>
+          <a:xfrm>
+            <a:off x="914400" y="1463040"/>
+            <a:ext cx="10241280" cy="3840480"/>
+          </a:xfrm>
+          <a:prstGeom prst="roundRect">
+            <a:avLst>
+              <a:gd name="adj" fmla="val 2857"/>
+            </a:avLst>
+          </a:prstGeom>
+          <a:solidFill>
+            <a:srgbClr val="111827">
+              <a:alpha val="80000"/>
+            </a:srgbClr>
+          </a:solidFill>
+          <a:ln w="12700">
+            <a:solidFill>
+              <a:srgbClr val="F59E0B"/>
+            </a:solidFill>
+            <a:prstDash val="solid"/>
+          </a:ln>
+        </p:spPr>
+      </p:sp>
+      <p:sp>
+        <p:nvSpPr>
+          <p:cNvPr id="6" name="Text 3"/>
+          <p:cNvSpPr/>
+          <p:nvPr/>
+        </p:nvSpPr>
+        <p:spPr>
+          <a:xfrm>
+            <a:off x="1097280" y="1737360"/>
+            <a:ext cx="9144000" cy="640080"/>
+          </a:xfrm>
+          <a:prstGeom prst="rect">
+            <a:avLst/>
+          </a:prstGeom>
+          <a:noFill/>
+          <a:ln/>
+        </p:spPr>
+        <p:txBody>
+          <a:bodyPr wrap="square" rtlCol="0" anchor="ctr"/>
+          <a:lstStyle/>
+          <a:p>
+            <a:pPr algn="ctr" indent="0" marL="0">
+              <a:buNone/>
+            </a:pPr>
+            <a:r>
+              <a:rPr lang="en-US" sz="2400" b="1" dirty="0">
+                <a:solidFill>
+                  <a:srgbClr val="FFFFFF"/>
+                </a:solidFill>
+              </a:rPr>
+              <a:t>Inson vs AI</a:t>
+            </a:r>
+            <a:endParaRPr lang="en-US" sz="2400" dirty="0"/>
+          </a:p>
+        </p:txBody>
+      </p:sp>
+      <p:sp>
+        <p:nvSpPr>
+          <p:cNvPr id="7" name="Text 4"/>
+          <p:cNvSpPr/>
+          <p:nvPr/>
+        </p:nvSpPr>
+        <p:spPr>
+          <a:xfrm>
+            <a:off x="1371600" y="2560320"/>
+            <a:ext cx="8686800" cy="2011680"/>
+          </a:xfrm>
+          <a:prstGeom prst="rect">
+            <a:avLst/>
+          </a:prstGeom>
+          <a:noFill/>
+          <a:ln/>
+        </p:spPr>
+        <p:txBody>
+          <a:bodyPr wrap="square" rtlCol="0" anchor="ctr">
+            <a:normAutofit/>
+          </a:bodyPr>
+          <a:lstStyle/>
+          <a:p>
+            <a:pPr algn="l" indent="0" marL="0">
+              <a:buNone/>
+            </a:pPr>
+            <a:r>
+              <a:rPr lang="en-US" sz="1600" dirty="0">
+                <a:solidFill>
+                  <a:srgbClr val="E5E7EB"/>
+                </a:solidFill>
+              </a:rPr>
+              <a:t>Inson va AI hamkorligi eng yuqori samaradorlikni beradi.</a:t>
+            </a:r>
+            <a:endParaRPr lang="en-US" sz="1600" dirty="0"/>
+          </a:p>
+        </p:txBody>
+      </p:sp>
+      <p:pic>
+        <p:nvPicPr>
+          <p:cNvPr id="8" name="Image 1" descr="https://images.pexels.com/photos/8386434/pexels-photo-8386434.jpeg?auto=compress&amp;cs=tinysrgb&amp;dpr=2&amp;h=650&amp;w=940">    </p:cNvPr>
+          <p:cNvPicPr>
+            <a:picLocks noChangeAspect="1"/>
+          </p:cNvPicPr>
+          <p:nvPr/>
+        </p:nvPicPr>
+        <p:blipFill>
+          <a:blip r:embed="rId2"/>
+          <a:stretch>
+            <a:fillRect/>
+          </a:stretch>
+        </p:blipFill>
+        <p:spPr>
+          <a:xfrm>
+            <a:off x="8686800" y="1828800"/>
+            <a:ext cx="1828800" cy="1828800"/>
+          </a:xfrm>
+          <a:prstGeom prst="rect">
+            <a:avLst/>
+          </a:prstGeom>
+        </p:spPr>
+      </p:pic>
+      <p:sp>
+        <p:nvSpPr>
+          <p:cNvPr id="9" name="Text 5"/>
+          <p:cNvSpPr/>
+          <p:nvPr/>
+        </p:nvSpPr>
+        <p:spPr>
+          <a:xfrm>
+            <a:off x="10972800" y="6217920"/>
+            <a:ext cx="365760" cy="182880"/>
+          </a:xfrm>
+          <a:prstGeom prst="rect">
+            <a:avLst/>
+          </a:prstGeom>
+          <a:noFill/>
+          <a:ln/>
+        </p:spPr>
+        <p:txBody>
+          <a:bodyPr wrap="square" rtlCol="0" anchor="ctr"/>
+          <a:lstStyle/>
+          <a:p>
+            <a:pPr indent="0" marL="0">
+              <a:buNone/>
+            </a:pPr>
+            <a:r>
+              <a:rPr lang="en-US" sz="1000" dirty="0">
+                <a:solidFill>
+                  <a:srgbClr val="94A3B8"/>
+                </a:solidFill>
+              </a:rPr>
+              <a:t>8</a:t>
+            </a:r>
+            <a:endParaRPr lang="en-US" sz="1000" dirty="0"/>
+          </a:p>
+        </p:txBody>
+      </p:sp>
+    </p:spTree>
+  </p:cSld>
+  <p:clrMapOvr>
+    <a:masterClrMapping/>
+  </p:clrMapOvr>
+</p:sld>
+</file>
+
+<file path=ppt/slides/slide9.xml><?xml version="1.0" encoding="utf-8"?>
+<p:sld xmlns:a="http://schemas.openxmlformats.org/drawingml/2006/main" xmlns:r="http://schemas.openxmlformats.org/officeDocument/2006/relationships" xmlns:p="http://schemas.openxmlformats.org/presentationml/2006/main">
+  <p:cSld name="Slide 9">
+    <p:spTree>
+      <p:nvGrpSpPr>
+        <p:cNvPr id="1" name=""/>
+        <p:cNvGrpSpPr/>
+        <p:nvPr/>
+      </p:nvGrpSpPr>
+      <p:grpSpPr>
+        <a:xfrm>
+          <a:off x="0" y="0"/>
+          <a:ext cx="0" cy="0"/>
+          <a:chOff x="0" y="0"/>
+          <a:chExt cx="0" cy="0"/>
+        </a:xfrm>
+      </p:grpSpPr>
+      <p:pic>
+        <p:nvPicPr>
+          <p:cNvPr id="2" name="Image 0" descr="https://images.pexels.com/photos/29506609/pexels-photo-29506609.jpeg?auto=compress&amp;cs=tinysrgb&amp;dpr=2&amp;h=650&amp;w=940">    </p:cNvPr>
+          <p:cNvPicPr>
+            <a:picLocks noChangeAspect="1"/>
+          </p:cNvPicPr>
+          <p:nvPr/>
+        </p:nvPicPr>
+        <p:blipFill>
+          <a:blip r:embed="rId1"/>
+          <a:stretch>
+            <a:fillRect/>
+          </a:stretch>
+        </p:blipFill>
+        <p:spPr>
+          <a:xfrm>
+            <a:off x="0" y="0"/>
+            <a:ext cx="12188952" cy="6858000"/>
+          </a:xfrm>
+          <a:prstGeom prst="rect">
+            <a:avLst/>
+          </a:prstGeom>
+        </p:spPr>
+      </p:pic>
+      <p:sp>
+        <p:nvSpPr>
+          <p:cNvPr id="3" name="Shape 0"/>
+          <p:cNvSpPr/>
+          <p:nvPr/>
+        </p:nvSpPr>
+        <p:spPr>
+          <a:xfrm>
+            <a:off x="0" y="0"/>
+            <a:ext cx="12188952" cy="6858000"/>
+          </a:xfrm>
+          <a:prstGeom prst="rect">
+            <a:avLst/>
+          </a:prstGeom>
+          <a:solidFill>
+            <a:srgbClr val="000000">
+              <a:alpha val="35000"/>
+            </a:srgbClr>
+          </a:solidFill>
+          <a:ln w="12700">
+            <a:solidFill>
+              <a:srgbClr val="000000">
+                <a:alpha val="0"/>
+              </a:srgbClr>
+            </a:solidFill>
+            <a:prstDash val="solid"/>
+          </a:ln>
+        </p:spPr>
+      </p:sp>
+      <p:sp>
+        <p:nvSpPr>
+          <p:cNvPr id="4" name="Shape 1"/>
+          <p:cNvSpPr/>
+          <p:nvPr/>
+        </p:nvSpPr>
+        <p:spPr>
+          <a:xfrm>
+            <a:off x="0" y="0"/>
+            <a:ext cx="12188952" cy="73152"/>
+          </a:xfrm>
+          <a:prstGeom prst="rect">
+            <a:avLst/>
+          </a:prstGeom>
+          <a:solidFill>
+            <a:srgbClr val="3B82F6"/>
+          </a:solidFill>
+          <a:ln w="12700">
+            <a:solidFill>
+              <a:srgbClr val="3B82F6"/>
+            </a:solidFill>
+            <a:prstDash val="solid"/>
+          </a:ln>
+        </p:spPr>
+      </p:sp>
+      <p:sp>
+        <p:nvSpPr>
+          <p:cNvPr id="5" name="Text 2"/>
+          <p:cNvSpPr/>
+          <p:nvPr/>
+        </p:nvSpPr>
+        <p:spPr>
+          <a:xfrm>
+            <a:off x="731520" y="640080"/>
+            <a:ext cx="10515600" cy="731520"/>
+          </a:xfrm>
+          <a:prstGeom prst="rect">
+            <a:avLst/>
+          </a:prstGeom>
+          <a:noFill/>
+          <a:ln/>
+        </p:spPr>
+        <p:txBody>
+          <a:bodyPr wrap="square" rtlCol="0" anchor="ctr"/>
+          <a:lstStyle/>
+          <a:p>
+            <a:pPr algn="ctr" indent="0" marL="0">
+              <a:buNone/>
+            </a:pPr>
+            <a:r>
+              <a:rPr lang="en-US" sz="2400" b="1" dirty="0">
+                <a:solidFill>
+                  <a:srgbClr val="FFFFFF"/>
+                </a:solidFill>
+                <a:latin typeface="Aptos" pitchFamily="34" charset="0"/>
+                <a:ea typeface="Aptos" pitchFamily="34" charset="-122"/>
+                <a:cs typeface="Aptos" pitchFamily="34" charset="-120"/>
+              </a:rPr>
+              <a:t>Xavfsizlik va Etika</a:t>
+            </a:r>
+            <a:endParaRPr lang="en-US" sz="2400" dirty="0"/>
+          </a:p>
+        </p:txBody>
+      </p:sp>
+      <p:sp>
+        <p:nvSpPr>
+          <p:cNvPr id="6" name="Shape 3"/>
+          <p:cNvSpPr/>
+          <p:nvPr/>
+        </p:nvSpPr>
+        <p:spPr>
+          <a:xfrm>
+            <a:off x="731520" y="1645920"/>
+            <a:ext cx="10607040" cy="3474720"/>
+          </a:xfrm>
+          <a:prstGeom prst="roundRect">
+            <a:avLst>
+              <a:gd name="adj" fmla="val 3158"/>
+            </a:avLst>
+          </a:prstGeom>
+          <a:solidFill>
+            <a:srgbClr val="111827">
+              <a:alpha val="92000"/>
+            </a:srgbClr>
+          </a:solidFill>
+          <a:ln w="12700">
+            <a:solidFill>
+              <a:srgbClr val="3B82F6"/>
+            </a:solidFill>
+            <a:prstDash val="solid"/>
+          </a:ln>
+        </p:spPr>
+      </p:sp>
+      <p:sp>
+        <p:nvSpPr>
+          <p:cNvPr id="7" name="Text 4"/>
+          <p:cNvSpPr/>
+          <p:nvPr/>
+        </p:nvSpPr>
+        <p:spPr>
+          <a:xfrm>
+            <a:off x="1005840" y="1920240"/>
+            <a:ext cx="5943600" cy="2743200"/>
+          </a:xfrm>
+          <a:prstGeom prst="rect">
+            <a:avLst/>
+          </a:prstGeom>
+          <a:noFill/>
+          <a:ln/>
+        </p:spPr>
+        <p:txBody>
+          <a:bodyPr wrap="square" rtlCol="0" anchor="ctr">
+            <a:normAutofit/>
+          </a:bodyPr>
+          <a:lstStyle/>
+          <a:p>
+            <a:pPr indent="0" marL="0">
+              <a:buNone/>
+            </a:pPr>
+            <a:r>
+              <a:rPr lang="en-US" sz="1500" dirty="0">
+                <a:solidFill>
+                  <a:srgbClr val="DBEAFE"/>
+                </a:solidFill>
+                <a:latin typeface="Aptos" pitchFamily="34" charset="0"/>
+                <a:ea typeface="Aptos" pitchFamily="34" charset="-122"/>
+                <a:cs typeface="Aptos" pitchFamily="34" charset="-120"/>
+              </a:rPr>
+              <a:t>Texnologik taraqqiyot bilan birga axloqiy mas'uliyat ham o'sib bormoqda. 🛡️</a:t>
+            </a:r>
+            <a:endParaRPr lang="en-US" sz="1500" dirty="0"/>
+          </a:p>
+          <a:p>
+            <a:pPr indent="0" marL="0">
+              <a:buNone/>
+            </a:pPr>
+            <a:endParaRPr lang="en-US" sz="1500" dirty="0"/>
+          </a:p>
+          <a:p>
+            <a:pPr indent="0" marL="0">
+              <a:buNone/>
+            </a:pPr>
+            <a:r>
+              <a:rPr lang="en-US" sz="1500" dirty="0">
+                <a:solidFill>
+                  <a:srgbClr val="DBEAFE"/>
+                </a:solidFill>
+                <a:latin typeface="Aptos" pitchFamily="34" charset="0"/>
+                <a:ea typeface="Aptos" pitchFamily="34" charset="-122"/>
+                <a:cs typeface="Aptos" pitchFamily="34" charset="-120"/>
+              </a:rPr>
+              <a:t>Asosiy tamoyillar:</a:t>
+            </a:r>
+            <a:endParaRPr lang="en-US" sz="1500" dirty="0"/>
+          </a:p>
+          <a:p>
+            <a:pPr indent="0" marL="0">
+              <a:buNone/>
+            </a:pPr>
+            <a:r>
+              <a:rPr lang="en-US" sz="1500" dirty="0">
+                <a:solidFill>
+                  <a:srgbClr val="DBEAFE"/>
+                </a:solidFill>
+                <a:latin typeface="Aptos" pitchFamily="34" charset="0"/>
+                <a:ea typeface="Aptos" pitchFamily="34" charset="-122"/>
+                <a:cs typeface="Aptos" pitchFamily="34" charset="-120"/>
+              </a:rPr>
+              <a:t>• Ma'lumotlar maxfiyligi</a:t>
+            </a:r>
+            <a:endParaRPr lang="en-US" sz="1500" dirty="0"/>
+          </a:p>
+          <a:p>
+            <a:pPr indent="0" marL="0">
+              <a:buNone/>
+            </a:pPr>
+            <a:r>
+              <a:rPr lang="en-US" sz="1500" dirty="0">
+                <a:solidFill>
+                  <a:srgbClr val="DBEAFE"/>
+                </a:solidFill>
+                <a:latin typeface="Aptos" pitchFamily="34" charset="0"/>
+                <a:ea typeface="Aptos" pitchFamily="34" charset="-122"/>
+                <a:cs typeface="Aptos" pitchFamily="34" charset="-120"/>
+              </a:rPr>
+              <a:t>• Shaffoflik</a:t>
+            </a:r>
+            <a:endParaRPr lang="en-US" sz="1500" dirty="0"/>
+          </a:p>
+          <a:p>
+            <a:pPr indent="0" marL="0">
+              <a:buNone/>
+            </a:pPr>
+            <a:r>
+              <a:rPr lang="en-US" sz="1500" dirty="0">
+                <a:solidFill>
+                  <a:srgbClr val="DBEAFE"/>
+                </a:solidFill>
+                <a:latin typeface="Aptos" pitchFamily="34" charset="0"/>
+                <a:ea typeface="Aptos" pitchFamily="34" charset="-122"/>
+                <a:cs typeface="Aptos" pitchFamily="34" charset="-120"/>
+              </a:rPr>
+              <a:t>• Adolatli algoritmlar</a:t>
+            </a:r>
+            <a:endParaRPr lang="en-US" sz="1500" dirty="0"/>
+          </a:p>
+        </p:txBody>
+      </p:sp>
+      <p:sp>
+        <p:nvSpPr>
+          <p:cNvPr id="8" name="Shape 5"/>
+          <p:cNvSpPr/>
+          <p:nvPr/>
+        </p:nvSpPr>
+        <p:spPr>
+          <a:xfrm>
+            <a:off x="7315200" y="4069080"/>
+            <a:ext cx="3200400" cy="868680"/>
+          </a:xfrm>
+          <a:prstGeom prst="roundRect">
+            <a:avLst>
+              <a:gd name="adj" fmla="val 8421"/>
+            </a:avLst>
+          </a:prstGeom>
+          <a:solidFill>
+            <a:srgbClr val="3B82F6">
+              <a:alpha val="82000"/>
+            </a:srgbClr>
+          </a:solidFill>
+          <a:ln w="12700">
+            <a:solidFill>
+              <a:srgbClr val="3B82F6"/>
+            </a:solidFill>
+            <a:prstDash val="solid"/>
+          </a:ln>
+        </p:spPr>
+      </p:sp>
+      <p:sp>
+        <p:nvSpPr>
+          <p:cNvPr id="9" name="Text 6"/>
+          <p:cNvSpPr/>
+          <p:nvPr/>
+        </p:nvSpPr>
+        <p:spPr>
+          <a:xfrm>
+            <a:off x="7452360" y="4233672"/>
+            <a:ext cx="2880360" cy="713232"/>
+          </a:xfrm>
+          <a:prstGeom prst="rect">
+            <a:avLst/>
+          </a:prstGeom>
+          <a:noFill/>
+          <a:ln/>
+        </p:spPr>
+        <p:txBody>
+          <a:bodyPr wrap="square" rtlCol="0" anchor="ctr">
+            <a:normAutofit/>
+          </a:bodyPr>
+          <a:lstStyle/>
+          <a:p>
+            <a:pPr indent="0" marL="0">
+              <a:buNone/>
+            </a:pPr>
+            <a:r>
+              <a:rPr lang="en-US" sz="1000" b="1" dirty="0">
+                <a:solidFill>
+                  <a:srgbClr val="FFFFFF"/>
+                </a:solidFill>
+              </a:rPr>
+              <a:t>📊 AI xavfsizligi bo'yicha sarmoyalar o'tgan yili 60% ga oshdi.</a:t>
+            </a:r>
+            <a:endParaRPr lang="en-US" sz="1000" dirty="0"/>
+          </a:p>
+        </p:txBody>
+      </p:sp>
+      <p:graphicFrame>
+        <p:nvGraphicFramePr>
+          <p:cNvPr id="10" name="Chart 0" descr=""/>
+          <p:cNvGraphicFramePr/>
+          <p:nvPr/>
+        </p:nvGraphicFramePr>
+        <p:xfrm>
+          <a:off x="7635240" y="2057400"/>
+          <a:ext cx="2194560" cy="1280160"/>
+        </p:xfrm>
+        <a:graphic xmlns:a="http://schemas.openxmlformats.org/drawingml/2006/main">
+          <a:graphicData uri="http://schemas.openxmlformats.org/drawingml/2006/chart">
+            <c:chart xmlns:c="http://schemas.openxmlformats.org/drawingml/2006/chart" r:id="rId2"/>
+          </a:graphicData>
+        </a:graphic>
+      </p:graphicFrame>
+      <p:sp>
+        <p:nvSpPr>
+          <p:cNvPr id="11" name="Shape 7"/>
+          <p:cNvSpPr/>
+          <p:nvPr/>
+        </p:nvSpPr>
+        <p:spPr>
+          <a:xfrm>
+            <a:off x="9235440" y="3017520"/>
+            <a:ext cx="0" cy="731520"/>
+          </a:xfrm>
+          <a:prstGeom prst="line">
+            <a:avLst/>
+          </a:prstGeom>
+          <a:noFill/>
+          <a:ln w="25400">
+            <a:solidFill>
+              <a:srgbClr val="3B82F6"/>
+            </a:solidFill>
+            <a:prstDash val="solid"/>
+          </a:ln>
+        </p:spPr>
+      </p:sp>
+      <p:sp>
+        <p:nvSpPr>
+          <p:cNvPr id="12" name="Shape 8"/>
+          <p:cNvSpPr/>
+          <p:nvPr/>
+        </p:nvSpPr>
+        <p:spPr>
+          <a:xfrm>
+            <a:off x="8412480" y="2651760"/>
+            <a:ext cx="164592" cy="164592"/>
+          </a:xfrm>
+          <a:prstGeom prst="ellipse">
+            <a:avLst/>
+          </a:prstGeom>
+          <a:solidFill>
+            <a:srgbClr val="3B82F6"/>
+          </a:solidFill>
+          <a:ln w="12700">
+            <a:solidFill>
+              <a:srgbClr val="3B82F6"/>
+            </a:solidFill>
+            <a:prstDash val="solid"/>
+          </a:ln>
+        </p:spPr>
+      </p:sp>
+      <p:sp>
+        <p:nvSpPr>
+          <p:cNvPr id="13" name="Shape 9"/>
+          <p:cNvSpPr/>
+          <p:nvPr/>
+        </p:nvSpPr>
+        <p:spPr>
+          <a:xfrm>
+            <a:off x="9235440" y="2651760"/>
+            <a:ext cx="164592" cy="164592"/>
+          </a:xfrm>
+          <a:prstGeom prst="ellipse">
+            <a:avLst/>
+          </a:prstGeom>
+          <a:solidFill>
+            <a:srgbClr val="3B82F6"/>
+          </a:solidFill>
+          <a:ln w="12700">
+            <a:solidFill>
+              <a:srgbClr val="3B82F6"/>
+            </a:solidFill>
+            <a:prstDash val="solid"/>
+          </a:ln>
+        </p:spPr>
+      </p:sp>
+      <p:sp>
+        <p:nvSpPr>
+          <p:cNvPr id="14" name="Shape 10"/>
+          <p:cNvSpPr/>
+          <p:nvPr/>
+        </p:nvSpPr>
+        <p:spPr>
+          <a:xfrm>
+            <a:off x="10058400" y="2651760"/>
+            <a:ext cx="164592" cy="164592"/>
+          </a:xfrm>
+          <a:prstGeom prst="ellipse">
+            <a:avLst/>
+          </a:prstGeom>
+          <a:solidFill>
+            <a:srgbClr val="3B82F6"/>
+          </a:solidFill>
+          <a:ln w="12700">
+            <a:solidFill>
+              <a:srgbClr val="3B82F6"/>
+            </a:solidFill>
+            <a:prstDash val="solid"/>
+          </a:ln>
+        </p:spPr>
+      </p:sp>
+      <p:pic>
+        <p:nvPicPr>
+          <p:cNvPr id="15" name="Image 1" descr="https://images.pexels.com/photos/29506609/pexels-photo-29506609.jpeg?auto=compress&amp;cs=tinysrgb&amp;dpr=2&amp;h=650&amp;w=940">    </p:cNvPr>
+          <p:cNvPicPr>
+            <a:picLocks noChangeAspect="1"/>
+          </p:cNvPicPr>
+          <p:nvPr/>
+        </p:nvPicPr>
+        <p:blipFill>
+          <a:blip r:embed="rId3"/>
+          <a:stretch>
+            <a:fillRect/>
+          </a:stretch>
+        </p:blipFill>
+        <p:spPr>
+          <a:xfrm>
+            <a:off x="8138160" y="1828800"/>
+            <a:ext cx="2286000" cy="1920240"/>
+          </a:xfrm>
+          <a:prstGeom prst="rect">
+            <a:avLst/>
+          </a:prstGeom>
+        </p:spPr>
+      </p:pic>
+      <p:sp>
+        <p:nvSpPr>
+          <p:cNvPr id="16" name="Text 11"/>
+          <p:cNvSpPr/>
+          <p:nvPr/>
+        </p:nvSpPr>
+        <p:spPr>
+          <a:xfrm>
+            <a:off x="10972800" y="6217920"/>
+            <a:ext cx="365760" cy="182880"/>
+          </a:xfrm>
+          <a:prstGeom prst="rect">
+            <a:avLst/>
+          </a:prstGeom>
+          <a:noFill/>
+          <a:ln/>
+        </p:spPr>
+        <p:txBody>
+          <a:bodyPr wrap="square" rtlCol="0" anchor="ctr"/>
+          <a:lstStyle/>
+          <a:p>
+            <a:pPr indent="0" marL="0">
+              <a:buNone/>
+            </a:pPr>
+            <a:r>
+              <a:rPr lang="en-US" sz="1000" dirty="0">
+                <a:solidFill>
+                  <a:srgbClr val="94A3B8"/>
+                </a:solidFill>
+              </a:rPr>
+              <a:t>9</a:t>
             </a:r>
             <a:endParaRPr lang="en-US" sz="1000" dirty="0"/>
           </a:p>
